--- a/docs/content/wrangling_data/wrangling_data_activity.pptx
+++ b/docs/content/wrangling_data/wrangling_data_activity.pptx
@@ -17,6 +17,8 @@
     <p:sldId id="265" r:id="rId11"/>
     <p:sldId id="266" r:id="rId12"/>
     <p:sldId id="267" r:id="rId13"/>
+    <p:sldId id="268" r:id="rId14"/>
+    <p:sldId id="269" r:id="rId15"/>
   </p:sldIdLst>
   <p:sldSz cx="9144000" cy="5143500" type="screen16x9"/>
   <p:notesSz cx="6858000" cy="9144000"/>
@@ -3392,13 +3394,7 @@
             </a:pPr>
             <a:r>
               <a:rPr/>
-              <a:t>Part 8 · Saving your work with </a:t>
-            </a:r>
-            <a:r>
-              <a:rPr>
-                <a:latin typeface="Courier"/>
-              </a:rPr>
-              <a:t>write_csv()</a:t>
+              <a:t>Part 6 · The full pipeline</a:t>
             </a:r>
           </a:p>
         </p:txBody>
@@ -3433,20 +3429,378 @@
             <a:r>
               <a:rPr>
                 <a:solidFill>
+                  <a:srgbClr val="003B4F"/>
+                </a:solidFill>
+                <a:latin typeface="Courier"/>
+              </a:rPr>
+              <a:t>pine_wrangled_df &lt;- pine_csv_df </a:t>
+            </a:r>
+            <a:r>
+              <a:rPr>
+                <a:solidFill>
+                  <a:srgbClr val="5E5E5E"/>
+                </a:solidFill>
+                <a:latin typeface="Courier"/>
+              </a:rPr>
+              <a:t>|&gt;</a:t>
+            </a:r>
+            <a:br/>
+            <a:r>
+              <a:rPr>
+                <a:solidFill>
+                  <a:srgbClr val="003B4F"/>
+                </a:solidFill>
+                <a:latin typeface="Courier"/>
+              </a:rPr>
+              <a:t>  </a:t>
+            </a:r>
+            <a:r>
+              <a:rPr>
+                <a:solidFill>
                   <a:srgbClr val="4758AB"/>
                 </a:solidFill>
                 <a:latin typeface="Courier"/>
               </a:rPr>
-              <a:t>write_csv</a:t>
-            </a:r>
-            <a:r>
-              <a:rPr>
-                <a:solidFill>
-                  <a:srgbClr val="003B4F"/>
-                </a:solidFill>
-                <a:latin typeface="Courier"/>
-              </a:rPr>
-              <a:t>(pine_wrangled_df, </a:t>
+              <a:t>filter</a:t>
+            </a:r>
+            <a:r>
+              <a:rPr>
+                <a:solidFill>
+                  <a:srgbClr val="003B4F"/>
+                </a:solidFill>
+                <a:latin typeface="Courier"/>
+              </a:rPr>
+              <a:t>(length_mm </a:t>
+            </a:r>
+            <a:r>
+              <a:rPr>
+                <a:solidFill>
+                  <a:srgbClr val="5E5E5E"/>
+                </a:solidFill>
+                <a:latin typeface="Courier"/>
+              </a:rPr>
+              <a:t>&gt;</a:t>
+            </a:r>
+            <a:r>
+              <a:rPr>
+                <a:solidFill>
+                  <a:srgbClr val="003B4F"/>
+                </a:solidFill>
+                <a:latin typeface="Courier"/>
+              </a:rPr>
+              <a:t> </a:t>
+            </a:r>
+            <a:r>
+              <a:rPr>
+                <a:solidFill>
+                  <a:srgbClr val="AD0000"/>
+                </a:solidFill>
+                <a:latin typeface="Courier"/>
+              </a:rPr>
+              <a:t>0</a:t>
+            </a:r>
+            <a:r>
+              <a:rPr>
+                <a:solidFill>
+                  <a:srgbClr val="003B4F"/>
+                </a:solidFill>
+                <a:latin typeface="Courier"/>
+              </a:rPr>
+              <a:t>) </a:t>
+            </a:r>
+            <a:r>
+              <a:rPr>
+                <a:solidFill>
+                  <a:srgbClr val="5E5E5E"/>
+                </a:solidFill>
+                <a:latin typeface="Courier"/>
+              </a:rPr>
+              <a:t>|&gt;</a:t>
+            </a:r>
+            <a:br/>
+            <a:r>
+              <a:rPr>
+                <a:solidFill>
+                  <a:srgbClr val="003B4F"/>
+                </a:solidFill>
+                <a:latin typeface="Courier"/>
+              </a:rPr>
+              <a:t>  </a:t>
+            </a:r>
+            <a:r>
+              <a:rPr>
+                <a:solidFill>
+                  <a:srgbClr val="4758AB"/>
+                </a:solidFill>
+                <a:latin typeface="Courier"/>
+              </a:rPr>
+              <a:t>select</a:t>
+            </a:r>
+            <a:r>
+              <a:rPr>
+                <a:solidFill>
+                  <a:srgbClr val="003B4F"/>
+                </a:solidFill>
+                <a:latin typeface="Courier"/>
+              </a:rPr>
+              <a:t>(group, n_s, wind, length_mm) </a:t>
+            </a:r>
+            <a:r>
+              <a:rPr>
+                <a:solidFill>
+                  <a:srgbClr val="5E5E5E"/>
+                </a:solidFill>
+                <a:latin typeface="Courier"/>
+              </a:rPr>
+              <a:t>|&gt;</a:t>
+            </a:r>
+            <a:br/>
+            <a:r>
+              <a:rPr>
+                <a:solidFill>
+                  <a:srgbClr val="003B4F"/>
+                </a:solidFill>
+                <a:latin typeface="Courier"/>
+              </a:rPr>
+              <a:t>  </a:t>
+            </a:r>
+            <a:r>
+              <a:rPr>
+                <a:solidFill>
+                  <a:srgbClr val="4758AB"/>
+                </a:solidFill>
+                <a:latin typeface="Courier"/>
+              </a:rPr>
+              <a:t>mutate</a:t>
+            </a:r>
+            <a:r>
+              <a:rPr>
+                <a:solidFill>
+                  <a:srgbClr val="003B4F"/>
+                </a:solidFill>
+                <a:latin typeface="Courier"/>
+              </a:rPr>
+              <a:t>(</a:t>
+            </a:r>
+            <a:br/>
+            <a:r>
+              <a:rPr>
+                <a:solidFill>
+                  <a:srgbClr val="003B4F"/>
+                </a:solidFill>
+                <a:latin typeface="Courier"/>
+              </a:rPr>
+              <a:t>    </a:t>
+            </a:r>
+            <a:r>
+              <a:rPr>
+                <a:solidFill>
+                  <a:srgbClr val="657422"/>
+                </a:solidFill>
+                <a:latin typeface="Courier"/>
+              </a:rPr>
+              <a:t>length_cm  =</a:t>
+            </a:r>
+            <a:r>
+              <a:rPr>
+                <a:solidFill>
+                  <a:srgbClr val="003B4F"/>
+                </a:solidFill>
+                <a:latin typeface="Courier"/>
+              </a:rPr>
+              <a:t> length_mm </a:t>
+            </a:r>
+            <a:r>
+              <a:rPr>
+                <a:solidFill>
+                  <a:srgbClr val="5E5E5E"/>
+                </a:solidFill>
+                <a:latin typeface="Courier"/>
+              </a:rPr>
+              <a:t>/</a:t>
+            </a:r>
+            <a:r>
+              <a:rPr>
+                <a:solidFill>
+                  <a:srgbClr val="003B4F"/>
+                </a:solidFill>
+                <a:latin typeface="Courier"/>
+              </a:rPr>
+              <a:t> </a:t>
+            </a:r>
+            <a:r>
+              <a:rPr>
+                <a:solidFill>
+                  <a:srgbClr val="AD0000"/>
+                </a:solidFill>
+                <a:latin typeface="Courier"/>
+              </a:rPr>
+              <a:t>10</a:t>
+            </a:r>
+            <a:r>
+              <a:rPr>
+                <a:solidFill>
+                  <a:srgbClr val="003B4F"/>
+                </a:solidFill>
+                <a:latin typeface="Courier"/>
+              </a:rPr>
+              <a:t>,</a:t>
+            </a:r>
+            <a:br/>
+            <a:r>
+              <a:rPr>
+                <a:solidFill>
+                  <a:srgbClr val="003B4F"/>
+                </a:solidFill>
+                <a:latin typeface="Courier"/>
+              </a:rPr>
+              <a:t>    </a:t>
+            </a:r>
+            <a:r>
+              <a:rPr>
+                <a:solidFill>
+                  <a:srgbClr val="657422"/>
+                </a:solidFill>
+                <a:latin typeface="Courier"/>
+              </a:rPr>
+              <a:t>log_length =</a:t>
+            </a:r>
+            <a:r>
+              <a:rPr>
+                <a:solidFill>
+                  <a:srgbClr val="003B4F"/>
+                </a:solidFill>
+                <a:latin typeface="Courier"/>
+              </a:rPr>
+              <a:t> </a:t>
+            </a:r>
+            <a:r>
+              <a:rPr>
+                <a:solidFill>
+                  <a:srgbClr val="4758AB"/>
+                </a:solidFill>
+                <a:latin typeface="Courier"/>
+              </a:rPr>
+              <a:t>log</a:t>
+            </a:r>
+            <a:r>
+              <a:rPr>
+                <a:solidFill>
+                  <a:srgbClr val="003B4F"/>
+                </a:solidFill>
+                <a:latin typeface="Courier"/>
+              </a:rPr>
+              <a:t>(length_mm),</a:t>
+            </a:r>
+            <a:br/>
+            <a:r>
+              <a:rPr>
+                <a:solidFill>
+                  <a:srgbClr val="003B4F"/>
+                </a:solidFill>
+                <a:latin typeface="Courier"/>
+              </a:rPr>
+              <a:t>    </a:t>
+            </a:r>
+            <a:r>
+              <a:rPr>
+                <a:solidFill>
+                  <a:srgbClr val="657422"/>
+                </a:solidFill>
+                <a:latin typeface="Courier"/>
+              </a:rPr>
+              <a:t>size_class =</a:t>
+            </a:r>
+            <a:r>
+              <a:rPr>
+                <a:solidFill>
+                  <a:srgbClr val="003B4F"/>
+                </a:solidFill>
+                <a:latin typeface="Courier"/>
+              </a:rPr>
+              <a:t> </a:t>
+            </a:r>
+            <a:r>
+              <a:rPr>
+                <a:solidFill>
+                  <a:srgbClr val="4758AB"/>
+                </a:solidFill>
+                <a:latin typeface="Courier"/>
+              </a:rPr>
+              <a:t>case_when</a:t>
+            </a:r>
+            <a:r>
+              <a:rPr>
+                <a:solidFill>
+                  <a:srgbClr val="003B4F"/>
+                </a:solidFill>
+                <a:latin typeface="Courier"/>
+              </a:rPr>
+              <a:t>(</a:t>
+            </a:r>
+            <a:br/>
+            <a:r>
+              <a:rPr>
+                <a:solidFill>
+                  <a:srgbClr val="003B4F"/>
+                </a:solidFill>
+                <a:latin typeface="Courier"/>
+              </a:rPr>
+              <a:t>      length_mm </a:t>
+            </a:r>
+            <a:r>
+              <a:rPr>
+                <a:solidFill>
+                  <a:srgbClr val="5E5E5E"/>
+                </a:solidFill>
+                <a:latin typeface="Courier"/>
+              </a:rPr>
+              <a:t>&lt;</a:t>
+            </a:r>
+            <a:r>
+              <a:rPr>
+                <a:solidFill>
+                  <a:srgbClr val="003B4F"/>
+                </a:solidFill>
+                <a:latin typeface="Courier"/>
+              </a:rPr>
+              <a:t> </a:t>
+            </a:r>
+            <a:r>
+              <a:rPr>
+                <a:solidFill>
+                  <a:srgbClr val="AD0000"/>
+                </a:solidFill>
+                <a:latin typeface="Courier"/>
+              </a:rPr>
+              <a:t>16</a:t>
+            </a:r>
+            <a:r>
+              <a:rPr>
+                <a:solidFill>
+                  <a:srgbClr val="003B4F"/>
+                </a:solidFill>
+                <a:latin typeface="Courier"/>
+              </a:rPr>
+              <a:t> </a:t>
+            </a:r>
+            <a:r>
+              <a:rPr>
+                <a:solidFill>
+                  <a:srgbClr val="5E5E5E"/>
+                </a:solidFill>
+                <a:latin typeface="Courier"/>
+              </a:rPr>
+              <a:t>~</a:t>
+            </a:r>
+            <a:r>
+              <a:rPr>
+                <a:solidFill>
+                  <a:srgbClr val="003B4F"/>
+                </a:solidFill>
+                <a:latin typeface="Courier"/>
+              </a:rPr>
+              <a:t> </a:t>
             </a:r>
             <a:r>
               <a:rPr>
@@ -3455,45 +3809,248 @@
                 </a:solidFill>
                 <a:latin typeface="Courier"/>
               </a:rPr>
-              <a:t>"data/pine_needles_wrangled.csv"</a:t>
-            </a:r>
-            <a:r>
-              <a:rPr>
-                <a:solidFill>
-                  <a:srgbClr val="003B4F"/>
-                </a:solidFill>
-                <a:latin typeface="Courier"/>
-              </a:rPr>
-              <a:t>)</a:t>
-            </a:r>
-          </a:p>
-          <a:p>
-            <a:pPr lvl="0" indent="0" marL="0">
-              <a:buNone/>
-            </a:pPr>
-            <a:r>
-              <a:rPr/>
-              <a:t>Check your </a:t>
-            </a:r>
-            <a:r>
-              <a:rPr>
-                <a:latin typeface="Courier"/>
-              </a:rPr>
-              <a:t>data/</a:t>
-            </a:r>
-            <a:r>
-              <a:rPr/>
-              <a:t> folder — the new CSV should be there, alongside (not instead of) the raw </a:t>
-            </a:r>
-            <a:r>
-              <a:rPr>
-                <a:latin typeface="Courier"/>
-              </a:rPr>
-              <a:t>pine_needles.csv</a:t>
-            </a:r>
-            <a:r>
-              <a:rPr/>
-              <a:t>.</a:t>
+              <a:t>"short"</a:t>
+            </a:r>
+            <a:r>
+              <a:rPr>
+                <a:solidFill>
+                  <a:srgbClr val="003B4F"/>
+                </a:solidFill>
+                <a:latin typeface="Courier"/>
+              </a:rPr>
+              <a:t>,</a:t>
+            </a:r>
+            <a:br/>
+            <a:r>
+              <a:rPr>
+                <a:solidFill>
+                  <a:srgbClr val="003B4F"/>
+                </a:solidFill>
+                <a:latin typeface="Courier"/>
+              </a:rPr>
+              <a:t>      length_mm </a:t>
+            </a:r>
+            <a:r>
+              <a:rPr>
+                <a:solidFill>
+                  <a:srgbClr val="5E5E5E"/>
+                </a:solidFill>
+                <a:latin typeface="Courier"/>
+              </a:rPr>
+              <a:t>&lt;</a:t>
+            </a:r>
+            <a:r>
+              <a:rPr>
+                <a:solidFill>
+                  <a:srgbClr val="003B4F"/>
+                </a:solidFill>
+                <a:latin typeface="Courier"/>
+              </a:rPr>
+              <a:t> </a:t>
+            </a:r>
+            <a:r>
+              <a:rPr>
+                <a:solidFill>
+                  <a:srgbClr val="AD0000"/>
+                </a:solidFill>
+                <a:latin typeface="Courier"/>
+              </a:rPr>
+              <a:t>20</a:t>
+            </a:r>
+            <a:r>
+              <a:rPr>
+                <a:solidFill>
+                  <a:srgbClr val="003B4F"/>
+                </a:solidFill>
+                <a:latin typeface="Courier"/>
+              </a:rPr>
+              <a:t> </a:t>
+            </a:r>
+            <a:r>
+              <a:rPr>
+                <a:solidFill>
+                  <a:srgbClr val="5E5E5E"/>
+                </a:solidFill>
+                <a:latin typeface="Courier"/>
+              </a:rPr>
+              <a:t>~</a:t>
+            </a:r>
+            <a:r>
+              <a:rPr>
+                <a:solidFill>
+                  <a:srgbClr val="003B4F"/>
+                </a:solidFill>
+                <a:latin typeface="Courier"/>
+              </a:rPr>
+              <a:t> </a:t>
+            </a:r>
+            <a:r>
+              <a:rPr>
+                <a:solidFill>
+                  <a:srgbClr val="20794D"/>
+                </a:solidFill>
+                <a:latin typeface="Courier"/>
+              </a:rPr>
+              <a:t>"medium"</a:t>
+            </a:r>
+            <a:r>
+              <a:rPr>
+                <a:solidFill>
+                  <a:srgbClr val="003B4F"/>
+                </a:solidFill>
+                <a:latin typeface="Courier"/>
+              </a:rPr>
+              <a:t>,</a:t>
+            </a:r>
+            <a:br/>
+            <a:r>
+              <a:rPr>
+                <a:solidFill>
+                  <a:srgbClr val="003B4F"/>
+                </a:solidFill>
+                <a:latin typeface="Courier"/>
+              </a:rPr>
+              <a:t>      </a:t>
+            </a:r>
+            <a:r>
+              <a:rPr>
+                <a:solidFill>
+                  <a:srgbClr val="8F5902"/>
+                </a:solidFill>
+                <a:latin typeface="Courier"/>
+              </a:rPr>
+              <a:t>TRUE</a:t>
+            </a:r>
+            <a:r>
+              <a:rPr>
+                <a:solidFill>
+                  <a:srgbClr val="003B4F"/>
+                </a:solidFill>
+                <a:latin typeface="Courier"/>
+              </a:rPr>
+              <a:t>           </a:t>
+            </a:r>
+            <a:r>
+              <a:rPr>
+                <a:solidFill>
+                  <a:srgbClr val="5E5E5E"/>
+                </a:solidFill>
+                <a:latin typeface="Courier"/>
+              </a:rPr>
+              <a:t>~</a:t>
+            </a:r>
+            <a:r>
+              <a:rPr>
+                <a:solidFill>
+                  <a:srgbClr val="003B4F"/>
+                </a:solidFill>
+                <a:latin typeface="Courier"/>
+              </a:rPr>
+              <a:t> </a:t>
+            </a:r>
+            <a:r>
+              <a:rPr>
+                <a:solidFill>
+                  <a:srgbClr val="20794D"/>
+                </a:solidFill>
+                <a:latin typeface="Courier"/>
+              </a:rPr>
+              <a:t>"long"</a:t>
+            </a:r>
+            <a:br/>
+            <a:r>
+              <a:rPr>
+                <a:solidFill>
+                  <a:srgbClr val="003B4F"/>
+                </a:solidFill>
+                <a:latin typeface="Courier"/>
+              </a:rPr>
+              <a:t>    )</a:t>
+            </a:r>
+            <a:br/>
+            <a:r>
+              <a:rPr>
+                <a:solidFill>
+                  <a:srgbClr val="003B4F"/>
+                </a:solidFill>
+                <a:latin typeface="Courier"/>
+              </a:rPr>
+              <a:t>  ) </a:t>
+            </a:r>
+            <a:r>
+              <a:rPr>
+                <a:solidFill>
+                  <a:srgbClr val="5E5E5E"/>
+                </a:solidFill>
+                <a:latin typeface="Courier"/>
+              </a:rPr>
+              <a:t>|&gt;</a:t>
+            </a:r>
+            <a:br/>
+            <a:r>
+              <a:rPr>
+                <a:solidFill>
+                  <a:srgbClr val="003B4F"/>
+                </a:solidFill>
+                <a:latin typeface="Courier"/>
+              </a:rPr>
+              <a:t>  </a:t>
+            </a:r>
+            <a:r>
+              <a:rPr>
+                <a:solidFill>
+                  <a:srgbClr val="4758AB"/>
+                </a:solidFill>
+                <a:latin typeface="Courier"/>
+              </a:rPr>
+              <a:t>arrange</a:t>
+            </a:r>
+            <a:r>
+              <a:rPr>
+                <a:solidFill>
+                  <a:srgbClr val="003B4F"/>
+                </a:solidFill>
+                <a:latin typeface="Courier"/>
+              </a:rPr>
+              <a:t>(n_s, </a:t>
+            </a:r>
+            <a:r>
+              <a:rPr>
+                <a:solidFill>
+                  <a:srgbClr val="4758AB"/>
+                </a:solidFill>
+                <a:latin typeface="Courier"/>
+              </a:rPr>
+              <a:t>desc</a:t>
+            </a:r>
+            <a:r>
+              <a:rPr>
+                <a:solidFill>
+                  <a:srgbClr val="003B4F"/>
+                </a:solidFill>
+                <a:latin typeface="Courier"/>
+              </a:rPr>
+              <a:t>(length_mm))</a:t>
+            </a:r>
+            <a:br/>
+            <a:br/>
+            <a:r>
+              <a:rPr>
+                <a:solidFill>
+                  <a:srgbClr val="4758AB"/>
+                </a:solidFill>
+                <a:latin typeface="Courier"/>
+              </a:rPr>
+              <a:t>head</a:t>
+            </a:r>
+            <a:r>
+              <a:rPr>
+                <a:solidFill>
+                  <a:srgbClr val="003B4F"/>
+                </a:solidFill>
+                <a:latin typeface="Courier"/>
+              </a:rPr>
+              <a:t>(pine_wrangled_df)</a:t>
             </a:r>
           </a:p>
           <a:p>
@@ -3510,27 +4067,7 @@
             </a:r>
             <a:r>
               <a:rPr/>
-              <a:t> Save your cleaned </a:t>
-            </a:r>
-            <a:r>
-              <a:rPr>
-                <a:latin typeface="Courier"/>
-              </a:rPr>
-              <a:t>needle_clean_df</a:t>
-            </a:r>
-            <a:r>
-              <a:rPr/>
-              <a:t> from Part 7 to </a:t>
-            </a:r>
-            <a:r>
-              <a:rPr>
-                <a:latin typeface="Courier"/>
-              </a:rPr>
-              <a:t>data/pine_needles_error_clean.csv</a:t>
-            </a:r>
-            <a:r>
-              <a:rPr/>
-              <a:t>.</a:t>
+              <a:t> In your own words, read this pipeline out loud, step by step, the way we did in lecture.</a:t>
             </a:r>
           </a:p>
           <a:p>
@@ -3539,29 +4076,10 @@
             </a:pPr>
             <a:r>
               <a:rPr>
-                <a:solidFill>
-                  <a:srgbClr val="5E5E5E"/>
-                </a:solidFill>
-                <a:latin typeface="Courier"/>
-              </a:rPr>
-              <a:t># Write your code here:</a:t>
-            </a:r>
-          </a:p>
-          <a:p>
-            <a:pPr lvl="0" indent="0" marL="1270000">
-              <a:buNone/>
-            </a:pPr>
-            <a:r>
-              <a:rPr sz="2000"/>
-              <a:t>⚠️ </a:t>
-            </a:r>
-            <a:r>
-              <a:rPr sz="2000" b="1"/>
-              <a:t>Watch out!</a:t>
-            </a:r>
-            <a:r>
-              <a:rPr sz="2000"/>
-              <a:t> Never give a wrangled file the same name as the raw file. If your script’s output can overwrite your raw data, one accidental re-run destroys it permanently.</a:t>
+                <a:latin typeface="Courier"/>
+              </a:rPr>
+              <a:t>Take pine_csv_df, then ______________________, then ______________________,
+then ______________________, then ______________________.</a:t>
             </a:r>
           </a:p>
         </p:txBody>
@@ -3613,7 +4131,7 @@
             </a:pPr>
             <a:r>
               <a:rPr/>
-              <a:t>Part 9 · Review and checkpoint</a:t>
+              <a:t>Part 7 · Finding duplicate rows</a:t>
             </a:r>
           </a:p>
         </p:txBody>
@@ -3637,131 +4155,301 @@
               <a:buNone/>
             </a:pPr>
             <a:r>
-              <a:rPr/>
-              <a:t>At this point you can:</a:t>
-            </a:r>
-          </a:p>
-          <a:p>
-            <a:pPr lvl="0"/>
-            <a:r>
-              <a:rPr/>
-              <a:t>☐ Read the same dataset from a </a:t>
-            </a:r>
-            <a:r>
-              <a:rPr>
-                <a:latin typeface="Courier"/>
-              </a:rPr>
-              <a:t>.csv</a:t>
-            </a:r>
-            <a:r>
-              <a:rPr/>
-              <a:t> and an </a:t>
-            </a:r>
-            <a:r>
-              <a:rPr>
-                <a:latin typeface="Courier"/>
-              </a:rPr>
-              <a:t>.xlsx</a:t>
-            </a:r>
-          </a:p>
-          <a:p>
-            <a:pPr lvl="0"/>
-            <a:r>
-              <a:rPr/>
-              <a:t>☐ Use </a:t>
-            </a:r>
-            <a:r>
-              <a:rPr>
-                <a:latin typeface="Courier"/>
-              </a:rPr>
-              <a:t>filter()</a:t>
-            </a:r>
-            <a:r>
-              <a:rPr/>
-              <a:t>, </a:t>
-            </a:r>
-            <a:r>
-              <a:rPr>
-                <a:latin typeface="Courier"/>
-              </a:rPr>
-              <a:t>select()</a:t>
-            </a:r>
-            <a:r>
-              <a:rPr/>
-              <a:t>, </a:t>
-            </a:r>
-            <a:r>
-              <a:rPr>
-                <a:latin typeface="Courier"/>
-              </a:rPr>
-              <a:t>mutate()</a:t>
-            </a:r>
-            <a:r>
-              <a:rPr/>
-              <a:t>, and </a:t>
-            </a:r>
-            <a:r>
-              <a:rPr>
-                <a:latin typeface="Courier"/>
-              </a:rPr>
-              <a:t>arrange()</a:t>
-            </a:r>
-            <a:r>
-              <a:rPr/>
-              <a:t> on real data</a:t>
-            </a:r>
-          </a:p>
-          <a:p>
-            <a:pPr lvl="0"/>
-            <a:r>
-              <a:rPr/>
-              <a:t>☐ Add a unit-converted column and a log-transformed column with </a:t>
-            </a:r>
-            <a:r>
-              <a:rPr>
-                <a:latin typeface="Courier"/>
-              </a:rPr>
-              <a:t>mutate()</a:t>
-            </a:r>
-          </a:p>
-          <a:p>
-            <a:pPr lvl="0"/>
-            <a:r>
-              <a:rPr/>
-              <a:t>☐ Chain multiple verbs into one pipeline with </a:t>
-            </a:r>
-            <a:r>
-              <a:rPr>
+              <a:rPr b="1"/>
+              <a:t>▶ Run this:</a:t>
+            </a:r>
+          </a:p>
+          <a:p>
+            <a:pPr lvl="0" indent="0">
+              <a:buNone/>
+            </a:pPr>
+            <a:r>
+              <a:rPr>
+                <a:solidFill>
+                  <a:srgbClr val="003B4F"/>
+                </a:solidFill>
+                <a:latin typeface="Courier"/>
+              </a:rPr>
+              <a:t>needle_check_df &lt;- </a:t>
+            </a:r>
+            <a:r>
+              <a:rPr>
+                <a:solidFill>
+                  <a:srgbClr val="4758AB"/>
+                </a:solidFill>
+                <a:latin typeface="Courier"/>
+              </a:rPr>
+              <a:t>read_csv</a:t>
+            </a:r>
+            <a:r>
+              <a:rPr>
+                <a:solidFill>
+                  <a:srgbClr val="003B4F"/>
+                </a:solidFill>
+                <a:latin typeface="Courier"/>
+              </a:rPr>
+              <a:t>(</a:t>
+            </a:r>
+            <a:r>
+              <a:rPr>
+                <a:solidFill>
+                  <a:srgbClr val="20794D"/>
+                </a:solidFill>
+                <a:latin typeface="Courier"/>
+              </a:rPr>
+              <a:t>"data/pine_needles_error.csv"</a:t>
+            </a:r>
+            <a:r>
+              <a:rPr>
+                <a:solidFill>
+                  <a:srgbClr val="003B4F"/>
+                </a:solidFill>
+                <a:latin typeface="Courier"/>
+              </a:rPr>
+              <a:t>)</a:t>
+            </a:r>
+            <a:br/>
+            <a:br/>
+            <a:r>
+              <a:rPr>
+                <a:solidFill>
+                  <a:srgbClr val="4758AB"/>
+                </a:solidFill>
+                <a:latin typeface="Courier"/>
+              </a:rPr>
+              <a:t>nrow</a:t>
+            </a:r>
+            <a:r>
+              <a:rPr>
+                <a:solidFill>
+                  <a:srgbClr val="003B4F"/>
+                </a:solidFill>
+                <a:latin typeface="Courier"/>
+              </a:rPr>
+              <a:t>(needle_check_df)</a:t>
+            </a:r>
+            <a:br/>
+            <a:r>
+              <a:rPr>
+                <a:solidFill>
+                  <a:srgbClr val="4758AB"/>
+                </a:solidFill>
+                <a:latin typeface="Courier"/>
+              </a:rPr>
+              <a:t>n_distinct</a:t>
+            </a:r>
+            <a:r>
+              <a:rPr>
+                <a:solidFill>
+                  <a:srgbClr val="003B4F"/>
+                </a:solidFill>
+                <a:latin typeface="Courier"/>
+              </a:rPr>
+              <a:t>(needle_check_df)</a:t>
+            </a:r>
+          </a:p>
+          <a:p>
+            <a:pPr lvl="0" indent="0" marL="0">
+              <a:buNone/>
+            </a:pPr>
+            <a:r>
+              <a:rPr/>
+              <a:t>✏️ </a:t>
+            </a:r>
+            <a:r>
+              <a:rPr b="1"/>
+              <a:t>Your turn:</a:t>
+            </a:r>
+            <a:r>
+              <a:rPr/>
+              <a:t> Do </a:t>
+            </a:r>
+            <a:r>
+              <a:rPr>
+                <a:latin typeface="Courier"/>
+              </a:rPr>
+              <a:t>nrow()</a:t>
+            </a:r>
+            <a:r>
+              <a:rPr/>
+              <a:t> and </a:t>
+            </a:r>
+            <a:r>
+              <a:rPr>
+                <a:latin typeface="Courier"/>
+              </a:rPr>
+              <a:t>n_distinct()</a:t>
+            </a:r>
+            <a:r>
+              <a:rPr/>
+              <a:t> match? What does that tell you? </a:t>
+            </a:r>
+            <a:r>
+              <a:rPr>
+                <a:latin typeface="Courier"/>
+              </a:rPr>
+              <a:t>________________________</a:t>
+            </a:r>
+          </a:p>
+          <a:p>
+            <a:pPr lvl="0" indent="0" marL="0">
+              <a:buNone/>
+            </a:pPr>
+            <a:r>
+              <a:rPr b="1"/>
+              <a:t>▶ Run this:</a:t>
+            </a:r>
+          </a:p>
+          <a:p>
+            <a:pPr lvl="0" indent="0">
+              <a:buNone/>
+            </a:pPr>
+            <a:r>
+              <a:rPr>
+                <a:solidFill>
+                  <a:srgbClr val="003B4F"/>
+                </a:solidFill>
+                <a:latin typeface="Courier"/>
+              </a:rPr>
+              <a:t>needle_check_df </a:t>
+            </a:r>
+            <a:r>
+              <a:rPr>
+                <a:solidFill>
+                  <a:srgbClr val="5E5E5E"/>
+                </a:solidFill>
                 <a:latin typeface="Courier"/>
               </a:rPr>
               <a:t>|&gt;</a:t>
             </a:r>
-          </a:p>
-          <a:p>
-            <a:pPr lvl="0"/>
-            <a:r>
-              <a:rPr/>
-              <a:t>☐ Check for duplicate rows with </a:t>
-            </a:r>
-            <a:r>
-              <a:rPr>
-                <a:latin typeface="Courier"/>
-              </a:rPr>
-              <a:t>nrow()</a:t>
-            </a:r>
-            <a:r>
-              <a:rPr/>
-              <a:t> / </a:t>
-            </a:r>
-            <a:r>
-              <a:rPr>
-                <a:latin typeface="Courier"/>
-              </a:rPr>
-              <a:t>n_distinct()</a:t>
-            </a:r>
-            <a:r>
-              <a:rPr/>
-              <a:t>, and remove them with </a:t>
+            <a:r>
+              <a:rPr>
+                <a:solidFill>
+                  <a:srgbClr val="003B4F"/>
+                </a:solidFill>
+                <a:latin typeface="Courier"/>
+              </a:rPr>
+              <a:t> </a:t>
+            </a:r>
+            <a:r>
+              <a:rPr>
+                <a:solidFill>
+                  <a:srgbClr val="4758AB"/>
+                </a:solidFill>
+                <a:latin typeface="Courier"/>
+              </a:rPr>
+              <a:t>filter</a:t>
+            </a:r>
+            <a:r>
+              <a:rPr>
+                <a:solidFill>
+                  <a:srgbClr val="003B4F"/>
+                </a:solidFill>
+                <a:latin typeface="Courier"/>
+              </a:rPr>
+              <a:t>(</a:t>
+            </a:r>
+            <a:r>
+              <a:rPr>
+                <a:solidFill>
+                  <a:srgbClr val="4758AB"/>
+                </a:solidFill>
+                <a:latin typeface="Courier"/>
+              </a:rPr>
+              <a:t>duplicated</a:t>
+            </a:r>
+            <a:r>
+              <a:rPr>
+                <a:solidFill>
+                  <a:srgbClr val="003B4F"/>
+                </a:solidFill>
+                <a:latin typeface="Courier"/>
+              </a:rPr>
+              <a:t>(needle_check_df))</a:t>
+            </a:r>
+            <a:br/>
+            <a:br/>
+            <a:r>
+              <a:rPr>
+                <a:solidFill>
+                  <a:srgbClr val="003B4F"/>
+                </a:solidFill>
+                <a:latin typeface="Courier"/>
+              </a:rPr>
+              <a:t>needle_clean_df &lt;- needle_check_df </a:t>
+            </a:r>
+            <a:r>
+              <a:rPr>
+                <a:solidFill>
+                  <a:srgbClr val="5E5E5E"/>
+                </a:solidFill>
+                <a:latin typeface="Courier"/>
+              </a:rPr>
+              <a:t>|&gt;</a:t>
+            </a:r>
+            <a:r>
+              <a:rPr>
+                <a:solidFill>
+                  <a:srgbClr val="003B4F"/>
+                </a:solidFill>
+                <a:latin typeface="Courier"/>
+              </a:rPr>
+              <a:t> </a:t>
+            </a:r>
+            <a:r>
+              <a:rPr>
+                <a:solidFill>
+                  <a:srgbClr val="4758AB"/>
+                </a:solidFill>
+                <a:latin typeface="Courier"/>
+              </a:rPr>
+              <a:t>distinct</a:t>
+            </a:r>
+            <a:r>
+              <a:rPr>
+                <a:solidFill>
+                  <a:srgbClr val="003B4F"/>
+                </a:solidFill>
+                <a:latin typeface="Courier"/>
+              </a:rPr>
+              <a:t>()</a:t>
+            </a:r>
+            <a:br/>
+            <a:br/>
+            <a:r>
+              <a:rPr>
+                <a:solidFill>
+                  <a:srgbClr val="4758AB"/>
+                </a:solidFill>
+                <a:latin typeface="Courier"/>
+              </a:rPr>
+              <a:t>nrow</a:t>
+            </a:r>
+            <a:r>
+              <a:rPr>
+                <a:solidFill>
+                  <a:srgbClr val="003B4F"/>
+                </a:solidFill>
+                <a:latin typeface="Courier"/>
+              </a:rPr>
+              <a:t>(needle_clean_df)</a:t>
+            </a:r>
+          </a:p>
+          <a:p>
+            <a:pPr lvl="0" indent="0" marL="0">
+              <a:buNone/>
+            </a:pPr>
+            <a:r>
+              <a:rPr/>
+              <a:t>✏️ </a:t>
+            </a:r>
+            <a:r>
+              <a:rPr b="1"/>
+              <a:t>Your turn:</a:t>
+            </a:r>
+            <a:r>
+              <a:rPr/>
+              <a:t> How many rows did </a:t>
             </a:r>
             <a:r>
               <a:rPr>
@@ -3769,120 +4457,50 @@
               </a:rPr>
               <a:t>distinct()</a:t>
             </a:r>
-          </a:p>
-          <a:p>
-            <a:pPr lvl="0"/>
-            <a:r>
-              <a:rPr/>
-              <a:t>☐ Save a new file with </a:t>
-            </a:r>
-            <a:r>
-              <a:rPr>
-                <a:latin typeface="Courier"/>
-              </a:rPr>
-              <a:t>write_csv()</a:t>
-            </a:r>
-            <a:r>
-              <a:rPr/>
-              <a:t> without touching the raw data</a:t>
-            </a:r>
-          </a:p>
-          <a:p>
-            <a:pPr lvl="0" indent="0" marL="0">
+            <a:r>
+              <a:rPr/>
+              <a:t> remove? Why does this matter for the sample size you’d report? </a:t>
+            </a:r>
+            <a:r>
+              <a:rPr>
+                <a:latin typeface="Courier"/>
+              </a:rPr>
+              <a:t>________________________</a:t>
+            </a:r>
+          </a:p>
+          <a:p>
+            <a:pPr lvl="0" indent="0" marL="1270000">
               <a:buNone/>
             </a:pPr>
             <a:r>
-              <a:rPr/>
-              <a:t>✏️ </a:t>
-            </a:r>
-            <a:r>
-              <a:rPr b="1"/>
-              <a:t>Your turn — before you move on:</a:t>
-            </a:r>
-            <a:r>
-              <a:rPr/>
-              <a:t> Run your whole script top to bottom. Ran cleanly? </a:t>
-            </a:r>
-            <a:r>
-              <a:rPr>
-                <a:latin typeface="Courier"/>
-              </a:rPr>
-              <a:t>Y / N</a:t>
-            </a:r>
-            <a:r>
-              <a:rPr/>
-              <a:t> — if not, the error was: </a:t>
-            </a:r>
-            <a:r>
-              <a:rPr>
-                <a:latin typeface="Courier"/>
-              </a:rPr>
-              <a:t>________________________</a:t>
-            </a:r>
-          </a:p>
-          <a:p>
-            <a:pPr lvl="0" indent="0" marL="1270000">
-              <a:buNone/>
-            </a:pPr>
+              <a:rPr sz="2000"/>
+              <a:t>⚠️ </a:t>
+            </a:r>
             <a:r>
               <a:rPr sz="2000" b="1"/>
-              <a:t>Note</a:t>
-            </a:r>
-          </a:p>
-          <a:p>
-            <a:pPr lvl="0" indent="0" marL="1270000">
-              <a:buNone/>
-            </a:pPr>
-            <a:r>
-              <a:rPr sz="2000" b="1"/>
-              <a:t>📤 What to turn in before next class</a:t>
-            </a:r>
-          </a:p>
-          <a:p>
-            <a:pPr lvl="0" indent="0" marL="1270000">
-              <a:buNone/>
-            </a:pPr>
+              <a:t>Watch out!</a:t>
+            </a:r>
             <a:r>
               <a:rPr sz="2000"/>
-              <a:t>Upload both of these to the course management system:</a:t>
-            </a:r>
-          </a:p>
-          <a:p>
-            <a:pPr lvl="0" indent="-342900" marL="342900">
-              <a:buAutoNum type="arabicPeriod"/>
-            </a:pPr>
+              <a:t> </a:t>
+            </a:r>
+            <a:r>
+              <a:rPr sz="2000">
+                <a:latin typeface="Courier"/>
+              </a:rPr>
+              <a:t>distinct()</a:t>
+            </a:r>
             <a:r>
               <a:rPr sz="2000"/>
-              <a:t>Your code — the </a:t>
-            </a:r>
-            <a:r>
-              <a:rPr sz="2000">
-                <a:latin typeface="Courier"/>
-              </a:rPr>
-              <a:t>scripts/</a:t>
+              <a:t> only catches </a:t>
+            </a:r>
+            <a:r>
+              <a:rPr sz="2000" i="1"/>
+              <a:t>exact</a:t>
             </a:r>
             <a:r>
               <a:rPr sz="2000"/>
-              <a:t> folder (or just </a:t>
-            </a:r>
-            <a:r>
-              <a:rPr sz="2000">
-                <a:latin typeface="Courier"/>
-              </a:rPr>
-              <a:t>02_wrangling_data.R</a:t>
-            </a:r>
-            <a:r>
-              <a:rPr sz="2000"/>
-              <a:t>)</a:t>
-            </a:r>
-          </a:p>
-          <a:p>
-            <a:pPr lvl="0" indent="-342900" marL="342900">
-              <a:buAutoNum type="arabicPeriod"/>
-            </a:pPr>
-            <a:r>
-              <a:rPr sz="2000"/>
-              <a:t>This worksheet, with your written answers</a:t>
+              <a:t> duplicate rows — a mistyped name won’t be caught. Always look at your data too.</a:t>
             </a:r>
           </a:p>
         </p:txBody>
@@ -3934,6 +4552,632 @@
             </a:pPr>
             <a:r>
               <a:rPr/>
+              <a:t>Part 8 · Saving your work with </a:t>
+            </a:r>
+            <a:r>
+              <a:rPr>
+                <a:latin typeface="Courier"/>
+              </a:rPr>
+              <a:t>write_csv()</a:t>
+            </a:r>
+          </a:p>
+        </p:txBody>
+      </p:sp>
+      <p:sp>
+        <p:nvSpPr>
+          <p:cNvPr id="3" name="Content Placeholder 2"/>
+          <p:cNvSpPr>
+            <a:spLocks noGrp="1"/>
+          </p:cNvSpPr>
+          <p:nvPr>
+            <p:ph idx="1"/>
+          </p:nvPr>
+        </p:nvSpPr>
+        <p:spPr/>
+        <p:txBody>
+          <a:bodyPr/>
+          <a:lstStyle/>
+          <a:p>
+            <a:pPr lvl="0" indent="0" marL="0">
+              <a:buNone/>
+            </a:pPr>
+            <a:r>
+              <a:rPr b="1"/>
+              <a:t>▶ Run this:</a:t>
+            </a:r>
+          </a:p>
+          <a:p>
+            <a:pPr lvl="0" indent="0">
+              <a:buNone/>
+            </a:pPr>
+            <a:r>
+              <a:rPr>
+                <a:solidFill>
+                  <a:srgbClr val="4758AB"/>
+                </a:solidFill>
+                <a:latin typeface="Courier"/>
+              </a:rPr>
+              <a:t>write_csv</a:t>
+            </a:r>
+            <a:r>
+              <a:rPr>
+                <a:solidFill>
+                  <a:srgbClr val="003B4F"/>
+                </a:solidFill>
+                <a:latin typeface="Courier"/>
+              </a:rPr>
+              <a:t>(pine_wrangled_df, </a:t>
+            </a:r>
+            <a:r>
+              <a:rPr>
+                <a:solidFill>
+                  <a:srgbClr val="20794D"/>
+                </a:solidFill>
+                <a:latin typeface="Courier"/>
+              </a:rPr>
+              <a:t>"data/pine_needles_wrangled.csv"</a:t>
+            </a:r>
+            <a:r>
+              <a:rPr>
+                <a:solidFill>
+                  <a:srgbClr val="003B4F"/>
+                </a:solidFill>
+                <a:latin typeface="Courier"/>
+              </a:rPr>
+              <a:t>)</a:t>
+            </a:r>
+          </a:p>
+          <a:p>
+            <a:pPr lvl="0" indent="0" marL="0">
+              <a:buNone/>
+            </a:pPr>
+            <a:r>
+              <a:rPr/>
+              <a:t>Check your </a:t>
+            </a:r>
+            <a:r>
+              <a:rPr>
+                <a:latin typeface="Courier"/>
+              </a:rPr>
+              <a:t>data/</a:t>
+            </a:r>
+            <a:r>
+              <a:rPr/>
+              <a:t> folder — the new CSV should be there, alongside (not instead of) the raw </a:t>
+            </a:r>
+            <a:r>
+              <a:rPr>
+                <a:latin typeface="Courier"/>
+              </a:rPr>
+              <a:t>pine_needles.csv</a:t>
+            </a:r>
+            <a:r>
+              <a:rPr/>
+              <a:t>.</a:t>
+            </a:r>
+          </a:p>
+          <a:p>
+            <a:pPr lvl="0" indent="0" marL="0">
+              <a:buNone/>
+            </a:pPr>
+            <a:r>
+              <a:rPr/>
+              <a:t>✏️ </a:t>
+            </a:r>
+            <a:r>
+              <a:rPr b="1"/>
+              <a:t>Your turn:</a:t>
+            </a:r>
+            <a:r>
+              <a:rPr/>
+              <a:t> Save your cleaned </a:t>
+            </a:r>
+            <a:r>
+              <a:rPr>
+                <a:latin typeface="Courier"/>
+              </a:rPr>
+              <a:t>needle_clean_df</a:t>
+            </a:r>
+            <a:r>
+              <a:rPr/>
+              <a:t> from Part 7 to </a:t>
+            </a:r>
+            <a:r>
+              <a:rPr>
+                <a:latin typeface="Courier"/>
+              </a:rPr>
+              <a:t>data/pine_needles_error_clean.csv</a:t>
+            </a:r>
+            <a:r>
+              <a:rPr/>
+              <a:t>.</a:t>
+            </a:r>
+          </a:p>
+          <a:p>
+            <a:pPr lvl="0" indent="0">
+              <a:buNone/>
+            </a:pPr>
+            <a:r>
+              <a:rPr>
+                <a:solidFill>
+                  <a:srgbClr val="5E5E5E"/>
+                </a:solidFill>
+                <a:latin typeface="Courier"/>
+              </a:rPr>
+              <a:t># Write your code here:</a:t>
+            </a:r>
+          </a:p>
+          <a:p>
+            <a:pPr lvl="0" indent="0" marL="1270000">
+              <a:buNone/>
+            </a:pPr>
+            <a:r>
+              <a:rPr sz="2000"/>
+              <a:t>⚠️ </a:t>
+            </a:r>
+            <a:r>
+              <a:rPr sz="2000" b="1"/>
+              <a:t>Watch out!</a:t>
+            </a:r>
+            <a:r>
+              <a:rPr sz="2000"/>
+              <a:t> Never give a wrangled file the same name as the raw file. If your script’s output can overwrite your raw data, one accidental re-run destroys it permanently.</a:t>
+            </a:r>
+          </a:p>
+        </p:txBody>
+      </p:sp>
+    </p:spTree>
+  </p:cSld>
+</p:sld>
+</file>
+
+<file path=ppt/slides/slide13.xml><?xml version="1.0" encoding="utf-8"?>
+<p:sld xmlns:a="http://schemas.openxmlformats.org/drawingml/2006/main" xmlns:r="http://schemas.openxmlformats.org/officeDocument/2006/relationships" xmlns:p="http://schemas.openxmlformats.org/presentationml/2006/main">
+  <p:cSld>
+    <p:spTree>
+      <p:nvGrpSpPr>
+        <p:cNvPr id="1" name=""/>
+        <p:cNvGrpSpPr/>
+        <p:nvPr/>
+      </p:nvGrpSpPr>
+      <p:grpSpPr>
+        <a:xfrm>
+          <a:off x="0" y="0"/>
+          <a:ext cx="0" cy="0"/>
+          <a:chOff x="0" y="0"/>
+          <a:chExt cx="0" cy="0"/>
+        </a:xfrm>
+      </p:grpSpPr>
+      <p:sp>
+        <p:nvSpPr>
+          <p:cNvPr id="2" name="Title 1"/>
+          <p:cNvSpPr>
+            <a:spLocks noGrp="1"/>
+          </p:cNvSpPr>
+          <p:nvPr>
+            <p:ph type="title"/>
+          </p:nvPr>
+        </p:nvSpPr>
+        <p:spPr>
+          <a:xfrm>
+            <a:off x="0" y="0"/>
+            <a:ext cx="9144000" cy="582780"/>
+          </a:xfrm>
+        </p:spPr>
+        <p:txBody>
+          <a:bodyPr/>
+          <a:lstStyle/>
+          <a:p>
+            <a:pPr lvl="0" indent="0" marL="0">
+              <a:buNone/>
+            </a:pPr>
+            <a:r>
+              <a:rPr/>
+              <a:t>Part 9 · Review and checkpoint</a:t>
+            </a:r>
+          </a:p>
+        </p:txBody>
+      </p:sp>
+      <p:sp>
+        <p:nvSpPr>
+          <p:cNvPr id="3" name="Content Placeholder 2"/>
+          <p:cNvSpPr>
+            <a:spLocks noGrp="1"/>
+          </p:cNvSpPr>
+          <p:nvPr>
+            <p:ph idx="1"/>
+          </p:nvPr>
+        </p:nvSpPr>
+        <p:spPr/>
+        <p:txBody>
+          <a:bodyPr/>
+          <a:lstStyle/>
+          <a:p>
+            <a:pPr lvl="0" indent="0" marL="0">
+              <a:buNone/>
+            </a:pPr>
+            <a:r>
+              <a:rPr/>
+              <a:t>At this point you can:</a:t>
+            </a:r>
+          </a:p>
+          <a:p>
+            <a:pPr lvl="0"/>
+            <a:r>
+              <a:rPr/>
+              <a:t>☐ Read the same dataset from a </a:t>
+            </a:r>
+            <a:r>
+              <a:rPr>
+                <a:latin typeface="Courier"/>
+              </a:rPr>
+              <a:t>.csv</a:t>
+            </a:r>
+            <a:r>
+              <a:rPr/>
+              <a:t> and an </a:t>
+            </a:r>
+            <a:r>
+              <a:rPr>
+                <a:latin typeface="Courier"/>
+              </a:rPr>
+              <a:t>.xlsx</a:t>
+            </a:r>
+          </a:p>
+          <a:p>
+            <a:pPr lvl="0"/>
+            <a:r>
+              <a:rPr/>
+              <a:t>☐ Use </a:t>
+            </a:r>
+            <a:r>
+              <a:rPr>
+                <a:latin typeface="Courier"/>
+              </a:rPr>
+              <a:t>filter()</a:t>
+            </a:r>
+            <a:r>
+              <a:rPr/>
+              <a:t>, </a:t>
+            </a:r>
+            <a:r>
+              <a:rPr>
+                <a:latin typeface="Courier"/>
+              </a:rPr>
+              <a:t>select()</a:t>
+            </a:r>
+            <a:r>
+              <a:rPr/>
+              <a:t>, </a:t>
+            </a:r>
+            <a:r>
+              <a:rPr>
+                <a:latin typeface="Courier"/>
+              </a:rPr>
+              <a:t>mutate()</a:t>
+            </a:r>
+            <a:r>
+              <a:rPr/>
+              <a:t>, and </a:t>
+            </a:r>
+            <a:r>
+              <a:rPr>
+                <a:latin typeface="Courier"/>
+              </a:rPr>
+              <a:t>arrange()</a:t>
+            </a:r>
+            <a:r>
+              <a:rPr/>
+              <a:t> on real data</a:t>
+            </a:r>
+          </a:p>
+          <a:p>
+            <a:pPr lvl="0"/>
+            <a:r>
+              <a:rPr/>
+              <a:t>☐ Filter with </a:t>
+            </a:r>
+            <a:r>
+              <a:rPr>
+                <a:latin typeface="Courier"/>
+              </a:rPr>
+              <a:t>%in%</a:t>
+            </a:r>
+            <a:r>
+              <a:rPr/>
+              <a:t>, </a:t>
+            </a:r>
+            <a:r>
+              <a:rPr>
+                <a:latin typeface="Courier"/>
+              </a:rPr>
+              <a:t>is.na()</a:t>
+            </a:r>
+            <a:r>
+              <a:rPr/>
+              <a:t>/</a:t>
+            </a:r>
+            <a:r>
+              <a:rPr>
+                <a:latin typeface="Courier"/>
+              </a:rPr>
+              <a:t>!is.na()</a:t>
+            </a:r>
+            <a:r>
+              <a:rPr/>
+              <a:t>, and both AND (</a:t>
+            </a:r>
+            <a:r>
+              <a:rPr>
+                <a:latin typeface="Courier"/>
+              </a:rPr>
+              <a:t>,</a:t>
+            </a:r>
+            <a:r>
+              <a:rPr/>
+              <a:t>) and OR (</a:t>
+            </a:r>
+            <a:r>
+              <a:rPr>
+                <a:latin typeface="Courier"/>
+              </a:rPr>
+              <a:t>|</a:t>
+            </a:r>
+            <a:r>
+              <a:rPr/>
+              <a:t>)</a:t>
+            </a:r>
+          </a:p>
+          <a:p>
+            <a:pPr lvl="0"/>
+            <a:r>
+              <a:rPr/>
+              <a:t>☐ Recode or bin a column with </a:t>
+            </a:r>
+            <a:r>
+              <a:rPr>
+                <a:latin typeface="Courier"/>
+              </a:rPr>
+              <a:t>case_when()</a:t>
+            </a:r>
+            <a:r>
+              <a:rPr/>
+              <a:t>, including a </a:t>
+            </a:r>
+            <a:r>
+              <a:rPr>
+                <a:latin typeface="Courier"/>
+              </a:rPr>
+              <a:t>TRUE ~</a:t>
+            </a:r>
+            <a:r>
+              <a:rPr/>
+              <a:t> catch-all</a:t>
+            </a:r>
+          </a:p>
+          <a:p>
+            <a:pPr lvl="0"/>
+            <a:r>
+              <a:rPr/>
+              <a:t>☐ Add a unit-converted column and a log-transformed column with </a:t>
+            </a:r>
+            <a:r>
+              <a:rPr>
+                <a:latin typeface="Courier"/>
+              </a:rPr>
+              <a:t>mutate()</a:t>
+            </a:r>
+          </a:p>
+          <a:p>
+            <a:pPr lvl="0"/>
+            <a:r>
+              <a:rPr/>
+              <a:t>☐ Chain multiple verbs into one pipeline with </a:t>
+            </a:r>
+            <a:r>
+              <a:rPr>
+                <a:latin typeface="Courier"/>
+              </a:rPr>
+              <a:t>|&gt;</a:t>
+            </a:r>
+          </a:p>
+          <a:p>
+            <a:pPr lvl="0"/>
+            <a:r>
+              <a:rPr/>
+              <a:t>☐ Check for duplicate rows with </a:t>
+            </a:r>
+            <a:r>
+              <a:rPr>
+                <a:latin typeface="Courier"/>
+              </a:rPr>
+              <a:t>nrow()</a:t>
+            </a:r>
+            <a:r>
+              <a:rPr/>
+              <a:t> / </a:t>
+            </a:r>
+            <a:r>
+              <a:rPr>
+                <a:latin typeface="Courier"/>
+              </a:rPr>
+              <a:t>n_distinct()</a:t>
+            </a:r>
+            <a:r>
+              <a:rPr/>
+              <a:t>, and remove them with </a:t>
+            </a:r>
+            <a:r>
+              <a:rPr>
+                <a:latin typeface="Courier"/>
+              </a:rPr>
+              <a:t>distinct()</a:t>
+            </a:r>
+          </a:p>
+          <a:p>
+            <a:pPr lvl="0"/>
+            <a:r>
+              <a:rPr/>
+              <a:t>☐ Save a new file with </a:t>
+            </a:r>
+            <a:r>
+              <a:rPr>
+                <a:latin typeface="Courier"/>
+              </a:rPr>
+              <a:t>write_csv()</a:t>
+            </a:r>
+            <a:r>
+              <a:rPr/>
+              <a:t> without touching the raw data</a:t>
+            </a:r>
+          </a:p>
+          <a:p>
+            <a:pPr lvl="0" indent="0" marL="0">
+              <a:buNone/>
+            </a:pPr>
+            <a:r>
+              <a:rPr/>
+              <a:t>✏️ </a:t>
+            </a:r>
+            <a:r>
+              <a:rPr b="1"/>
+              <a:t>Your turn — before you move on:</a:t>
+            </a:r>
+            <a:r>
+              <a:rPr/>
+              <a:t> Run your whole script top to bottom. Ran cleanly? </a:t>
+            </a:r>
+            <a:r>
+              <a:rPr>
+                <a:latin typeface="Courier"/>
+              </a:rPr>
+              <a:t>Y / N</a:t>
+            </a:r>
+            <a:r>
+              <a:rPr/>
+              <a:t> — if not, the error was: </a:t>
+            </a:r>
+            <a:r>
+              <a:rPr>
+                <a:latin typeface="Courier"/>
+              </a:rPr>
+              <a:t>________________________</a:t>
+            </a:r>
+          </a:p>
+          <a:p>
+            <a:pPr lvl="0" indent="0" marL="1270000">
+              <a:buNone/>
+            </a:pPr>
+            <a:r>
+              <a:rPr sz="2000" b="1"/>
+              <a:t>Note</a:t>
+            </a:r>
+          </a:p>
+          <a:p>
+            <a:pPr lvl="0" indent="0" marL="1270000">
+              <a:buNone/>
+            </a:pPr>
+            <a:r>
+              <a:rPr sz="2000" b="1"/>
+              <a:t>📤 What to turn in before next class</a:t>
+            </a:r>
+          </a:p>
+          <a:p>
+            <a:pPr lvl="0" indent="0" marL="1270000">
+              <a:buNone/>
+            </a:pPr>
+            <a:r>
+              <a:rPr sz="2000"/>
+              <a:t>Upload both of these to the course management system:</a:t>
+            </a:r>
+          </a:p>
+          <a:p>
+            <a:pPr lvl="0" indent="-342900" marL="342900">
+              <a:buAutoNum type="arabicPeriod"/>
+            </a:pPr>
+            <a:r>
+              <a:rPr sz="2000"/>
+              <a:t>Your code — the </a:t>
+            </a:r>
+            <a:r>
+              <a:rPr sz="2000">
+                <a:latin typeface="Courier"/>
+              </a:rPr>
+              <a:t>scripts/</a:t>
+            </a:r>
+            <a:r>
+              <a:rPr sz="2000"/>
+              <a:t> folder (or just </a:t>
+            </a:r>
+            <a:r>
+              <a:rPr sz="2000">
+                <a:latin typeface="Courier"/>
+              </a:rPr>
+              <a:t>02_wrangling_data.R</a:t>
+            </a:r>
+            <a:r>
+              <a:rPr sz="2000"/>
+              <a:t>)</a:t>
+            </a:r>
+          </a:p>
+          <a:p>
+            <a:pPr lvl="0" indent="-342900" marL="342900">
+              <a:buAutoNum type="arabicPeriod"/>
+            </a:pPr>
+            <a:r>
+              <a:rPr sz="2000"/>
+              <a:t>This worksheet, with your written answers</a:t>
+            </a:r>
+          </a:p>
+        </p:txBody>
+      </p:sp>
+    </p:spTree>
+  </p:cSld>
+</p:sld>
+</file>
+
+<file path=ppt/slides/slide14.xml><?xml version="1.0" encoding="utf-8"?>
+<p:sld xmlns:a="http://schemas.openxmlformats.org/drawingml/2006/main" xmlns:r="http://schemas.openxmlformats.org/officeDocument/2006/relationships" xmlns:p="http://schemas.openxmlformats.org/presentationml/2006/main">
+  <p:cSld>
+    <p:spTree>
+      <p:nvGrpSpPr>
+        <p:cNvPr id="1" name=""/>
+        <p:cNvGrpSpPr/>
+        <p:nvPr/>
+      </p:nvGrpSpPr>
+      <p:grpSpPr>
+        <a:xfrm>
+          <a:off x="0" y="0"/>
+          <a:ext cx="0" cy="0"/>
+          <a:chOff x="0" y="0"/>
+          <a:chExt cx="0" cy="0"/>
+        </a:xfrm>
+      </p:grpSpPr>
+      <p:sp>
+        <p:nvSpPr>
+          <p:cNvPr id="2" name="Title 1"/>
+          <p:cNvSpPr>
+            <a:spLocks noGrp="1"/>
+          </p:cNvSpPr>
+          <p:nvPr>
+            <p:ph type="title"/>
+          </p:nvPr>
+        </p:nvSpPr>
+        <p:spPr>
+          <a:xfrm>
+            <a:off x="0" y="0"/>
+            <a:ext cx="9144000" cy="582780"/>
+          </a:xfrm>
+        </p:spPr>
+        <p:txBody>
+          <a:bodyPr/>
+          <a:lstStyle/>
+          <a:p>
+            <a:pPr lvl="0" indent="0" marL="0">
+              <a:buNone/>
+            </a:pPr>
+            <a:r>
+              <a:rPr/>
               <a:t>Getting unstuck</a:t>
             </a:r>
           </a:p>
@@ -4992,17 +6236,27 @@
             </a:pPr>
             <a:r>
               <a:rPr/>
-              <a:t>Part 3 · </a:t>
-            </a:r>
-            <a:r>
-              <a:rPr>
-                <a:latin typeface="Courier"/>
-              </a:rPr>
-              <a:t>select()</a:t>
-            </a:r>
-            <a:r>
-              <a:rPr/>
-              <a:t> — picking columns</a:t>
+              <a:t>Part 2b · </a:t>
+            </a:r>
+            <a:r>
+              <a:rPr>
+                <a:latin typeface="Courier"/>
+              </a:rPr>
+              <a:t>filter()</a:t>
+            </a:r>
+            <a:r>
+              <a:rPr/>
+              <a:t> — OR, </a:t>
+            </a:r>
+            <a:r>
+              <a:rPr>
+                <a:latin typeface="Courier"/>
+              </a:rPr>
+              <a:t>%in%</a:t>
+            </a:r>
+            <a:r>
+              <a:rPr/>
+              <a:t>, and missing values</a:t>
             </a:r>
           </a:p>
         </p:txBody>
@@ -5037,6 +6291,16 @@
             <a:r>
               <a:rPr>
                 <a:solidFill>
+                  <a:srgbClr val="5E5E5E"/>
+                </a:solidFill>
+                <a:latin typeface="Courier"/>
+              </a:rPr>
+              <a:t># OR: lee side, OR any exceptionally long needle</a:t>
+            </a:r>
+            <a:br/>
+            <a:r>
+              <a:rPr>
+                <a:solidFill>
                   <a:srgbClr val="003B4F"/>
                 </a:solidFill>
                 <a:latin typeface="Courier"/>
@@ -5068,16 +6332,16 @@
                 </a:solidFill>
                 <a:latin typeface="Courier"/>
               </a:rPr>
-              <a:t>select</a:t>
-            </a:r>
-            <a:r>
-              <a:rPr>
-                <a:solidFill>
-                  <a:srgbClr val="003B4F"/>
-                </a:solidFill>
-                <a:latin typeface="Courier"/>
-              </a:rPr>
-              <a:t>(n_s, length_mm) </a:t>
+              <a:t>filter</a:t>
+            </a:r>
+            <a:r>
+              <a:rPr>
+                <a:solidFill>
+                  <a:srgbClr val="003B4F"/>
+                </a:solidFill>
+                <a:latin typeface="Courier"/>
+              </a:rPr>
+              <a:t>(n_s </a:t>
             </a:r>
             <a:r>
               <a:rPr>
@@ -5086,6 +6350,117 @@
                 </a:solidFill>
                 <a:latin typeface="Courier"/>
               </a:rPr>
+              <a:t>==</a:t>
+            </a:r>
+            <a:r>
+              <a:rPr>
+                <a:solidFill>
+                  <a:srgbClr val="003B4F"/>
+                </a:solidFill>
+                <a:latin typeface="Courier"/>
+              </a:rPr>
+              <a:t> </a:t>
+            </a:r>
+            <a:r>
+              <a:rPr>
+                <a:solidFill>
+                  <a:srgbClr val="20794D"/>
+                </a:solidFill>
+                <a:latin typeface="Courier"/>
+              </a:rPr>
+              <a:t>"n"</a:t>
+            </a:r>
+            <a:r>
+              <a:rPr>
+                <a:solidFill>
+                  <a:srgbClr val="003B4F"/>
+                </a:solidFill>
+                <a:latin typeface="Courier"/>
+              </a:rPr>
+              <a:t> </a:t>
+            </a:r>
+            <a:r>
+              <a:rPr>
+                <a:solidFill>
+                  <a:srgbClr val="5E5E5E"/>
+                </a:solidFill>
+                <a:latin typeface="Courier"/>
+              </a:rPr>
+              <a:t>|</a:t>
+            </a:r>
+            <a:r>
+              <a:rPr>
+                <a:solidFill>
+                  <a:srgbClr val="003B4F"/>
+                </a:solidFill>
+                <a:latin typeface="Courier"/>
+              </a:rPr>
+              <a:t> length_mm </a:t>
+            </a:r>
+            <a:r>
+              <a:rPr>
+                <a:solidFill>
+                  <a:srgbClr val="5E5E5E"/>
+                </a:solidFill>
+                <a:latin typeface="Courier"/>
+              </a:rPr>
+              <a:t>&gt;</a:t>
+            </a:r>
+            <a:r>
+              <a:rPr>
+                <a:solidFill>
+                  <a:srgbClr val="003B4F"/>
+                </a:solidFill>
+                <a:latin typeface="Courier"/>
+              </a:rPr>
+              <a:t> </a:t>
+            </a:r>
+            <a:r>
+              <a:rPr>
+                <a:solidFill>
+                  <a:srgbClr val="AD0000"/>
+                </a:solidFill>
+                <a:latin typeface="Courier"/>
+              </a:rPr>
+              <a:t>22</a:t>
+            </a:r>
+            <a:r>
+              <a:rPr>
+                <a:solidFill>
+                  <a:srgbClr val="003B4F"/>
+                </a:solidFill>
+                <a:latin typeface="Courier"/>
+              </a:rPr>
+              <a:t>)</a:t>
+            </a:r>
+            <a:br/>
+            <a:br/>
+            <a:r>
+              <a:rPr>
+                <a:solidFill>
+                  <a:srgbClr val="5E5E5E"/>
+                </a:solidFill>
+                <a:latin typeface="Courier"/>
+              </a:rPr>
+              <a:t># %in%: match one of several named teams</a:t>
+            </a:r>
+            <a:br/>
+            <a:r>
+              <a:rPr>
+                <a:solidFill>
+                  <a:srgbClr val="003B4F"/>
+                </a:solidFill>
+                <a:latin typeface="Courier"/>
+              </a:rPr>
+              <a:t>pine_csv_df </a:t>
+            </a:r>
+            <a:r>
+              <a:rPr>
+                <a:solidFill>
+                  <a:srgbClr val="5E5E5E"/>
+                </a:solidFill>
+                <a:latin typeface="Courier"/>
+              </a:rPr>
               <a:t>|&gt;</a:t>
             </a:r>
             <a:r>
@@ -5104,26 +6479,16 @@
                 </a:solidFill>
                 <a:latin typeface="Courier"/>
               </a:rPr>
-              <a:t>head</a:t>
-            </a:r>
-            <a:r>
-              <a:rPr>
-                <a:solidFill>
-                  <a:srgbClr val="003B4F"/>
-                </a:solidFill>
-                <a:latin typeface="Courier"/>
-              </a:rPr>
-              <a:t>()</a:t>
-            </a:r>
-            <a:br/>
-            <a:r>
-              <a:rPr>
-                <a:solidFill>
-                  <a:srgbClr val="003B4F"/>
-                </a:solidFill>
-                <a:latin typeface="Courier"/>
-              </a:rPr>
-              <a:t>pine_csv_df </a:t>
+              <a:t>filter</a:t>
+            </a:r>
+            <a:r>
+              <a:rPr>
+                <a:solidFill>
+                  <a:srgbClr val="003B4F"/>
+                </a:solidFill>
+                <a:latin typeface="Courier"/>
+              </a:rPr>
+              <a:t>(group </a:t>
             </a:r>
             <a:r>
               <a:rPr>
@@ -5132,7 +6497,7 @@
                 </a:solidFill>
                 <a:latin typeface="Courier"/>
               </a:rPr>
-              <a:t>|&gt;</a:t>
+              <a:t>%in%</a:t>
             </a:r>
             <a:r>
               <a:rPr>
@@ -5150,7 +6515,7 @@
                 </a:solidFill>
                 <a:latin typeface="Courier"/>
               </a:rPr>
-              <a:t>select</a:t>
+              <a:t>c</a:t>
             </a:r>
             <a:r>
               <a:rPr>
@@ -5164,56 +6529,38 @@
             <a:r>
               <a:rPr>
                 <a:solidFill>
-                  <a:srgbClr val="5E5E5E"/>
-                </a:solidFill>
-                <a:latin typeface="Courier"/>
-              </a:rPr>
-              <a:t>-</a:t>
-            </a:r>
-            <a:r>
-              <a:rPr>
-                <a:solidFill>
-                  <a:srgbClr val="003B4F"/>
-                </a:solidFill>
-                <a:latin typeface="Courier"/>
-              </a:rPr>
-              <a:t>date) </a:t>
-            </a:r>
-            <a:r>
-              <a:rPr>
-                <a:solidFill>
-                  <a:srgbClr val="5E5E5E"/>
-                </a:solidFill>
-                <a:latin typeface="Courier"/>
-              </a:rPr>
-              <a:t>|&gt;</a:t>
-            </a:r>
-            <a:r>
-              <a:rPr>
-                <a:solidFill>
-                  <a:srgbClr val="003B4F"/>
-                </a:solidFill>
-                <a:latin typeface="Courier"/>
-              </a:rPr>
-              <a:t> </a:t>
-            </a:r>
-            <a:r>
-              <a:rPr>
-                <a:solidFill>
-                  <a:srgbClr val="4758AB"/>
-                </a:solidFill>
-                <a:latin typeface="Courier"/>
-              </a:rPr>
-              <a:t>head</a:t>
-            </a:r>
-            <a:r>
-              <a:rPr>
-                <a:solidFill>
-                  <a:srgbClr val="003B4F"/>
-                </a:solidFill>
-                <a:latin typeface="Courier"/>
-              </a:rPr>
-              <a:t>()</a:t>
+                  <a:srgbClr val="20794D"/>
+                </a:solidFill>
+                <a:latin typeface="Courier"/>
+              </a:rPr>
+              <a:t>"cephalopods"</a:t>
+            </a:r>
+            <a:r>
+              <a:rPr>
+                <a:solidFill>
+                  <a:srgbClr val="003B4F"/>
+                </a:solidFill>
+                <a:latin typeface="Courier"/>
+              </a:rPr>
+              <a:t>, </a:t>
+            </a:r>
+            <a:r>
+              <a:rPr>
+                <a:solidFill>
+                  <a:srgbClr val="20794D"/>
+                </a:solidFill>
+                <a:latin typeface="Courier"/>
+              </a:rPr>
+              <a:t>"salmon"</a:t>
+            </a:r>
+            <a:r>
+              <a:rPr>
+                <a:solidFill>
+                  <a:srgbClr val="003B4F"/>
+                </a:solidFill>
+                <a:latin typeface="Courier"/>
+              </a:rPr>
+              <a:t>))</a:t>
             </a:r>
           </a:p>
           <a:p>
@@ -5230,31 +6577,547 @@
             </a:r>
             <a:r>
               <a:rPr/>
+              <a:t> Rewrite the </a:t>
+            </a:r>
+            <a:r>
+              <a:rPr>
+                <a:latin typeface="Courier"/>
+              </a:rPr>
+              <a:t>%in%</a:t>
+            </a:r>
+            <a:r>
+              <a:rPr/>
+              <a:t> line above as a chain of </a:t>
+            </a:r>
+            <a:r>
+              <a:rPr>
+                <a:latin typeface="Courier"/>
+              </a:rPr>
+              <a:t>|</a:t>
+            </a:r>
+            <a:r>
+              <a:rPr/>
+              <a:t> conditions instead — same result, longer code.</a:t>
+            </a:r>
+          </a:p>
+          <a:p>
+            <a:pPr lvl="0" indent="0">
+              <a:buNone/>
+            </a:pPr>
+            <a:r>
+              <a:rPr>
+                <a:solidFill>
+                  <a:srgbClr val="5E5E5E"/>
+                </a:solidFill>
+                <a:latin typeface="Courier"/>
+              </a:rPr>
+              <a:t># Write your code here:</a:t>
+            </a:r>
+          </a:p>
+          <a:p>
+            <a:pPr lvl="0" indent="0" marL="0">
+              <a:buNone/>
+            </a:pPr>
+            <a:r>
+              <a:rPr b="1"/>
+              <a:t>▶ Run this:</a:t>
+            </a:r>
+          </a:p>
+          <a:p>
+            <a:pPr lvl="0" indent="0">
+              <a:buNone/>
+            </a:pPr>
+            <a:r>
+              <a:rPr>
+                <a:solidFill>
+                  <a:srgbClr val="003B4F"/>
+                </a:solidFill>
+                <a:latin typeface="Courier"/>
+              </a:rPr>
+              <a:t>survey_df &lt;- </a:t>
+            </a:r>
+            <a:r>
+              <a:rPr>
+                <a:solidFill>
+                  <a:srgbClr val="4758AB"/>
+                </a:solidFill>
+                <a:latin typeface="Courier"/>
+              </a:rPr>
+              <a:t>tibble</a:t>
+            </a:r>
+            <a:r>
+              <a:rPr>
+                <a:solidFill>
+                  <a:srgbClr val="003B4F"/>
+                </a:solidFill>
+                <a:latin typeface="Courier"/>
+              </a:rPr>
+              <a:t>(</a:t>
+            </a:r>
+            <a:br/>
+            <a:r>
+              <a:rPr>
+                <a:solidFill>
+                  <a:srgbClr val="003B4F"/>
+                </a:solidFill>
+                <a:latin typeface="Courier"/>
+              </a:rPr>
+              <a:t>  </a:t>
+            </a:r>
+            <a:r>
+              <a:rPr>
+                <a:solidFill>
+                  <a:srgbClr val="657422"/>
+                </a:solidFill>
+                <a:latin typeface="Courier"/>
+              </a:rPr>
+              <a:t>site  =</a:t>
+            </a:r>
+            <a:r>
+              <a:rPr>
+                <a:solidFill>
+                  <a:srgbClr val="003B4F"/>
+                </a:solidFill>
+                <a:latin typeface="Courier"/>
+              </a:rPr>
+              <a:t> </a:t>
+            </a:r>
+            <a:r>
+              <a:rPr>
+                <a:solidFill>
+                  <a:srgbClr val="4758AB"/>
+                </a:solidFill>
+                <a:latin typeface="Courier"/>
+              </a:rPr>
+              <a:t>c</a:t>
+            </a:r>
+            <a:r>
+              <a:rPr>
+                <a:solidFill>
+                  <a:srgbClr val="003B4F"/>
+                </a:solidFill>
+                <a:latin typeface="Courier"/>
+              </a:rPr>
+              <a:t>(</a:t>
+            </a:r>
+            <a:r>
+              <a:rPr>
+                <a:solidFill>
+                  <a:srgbClr val="20794D"/>
+                </a:solidFill>
+                <a:latin typeface="Courier"/>
+              </a:rPr>
+              <a:t>"A"</a:t>
+            </a:r>
+            <a:r>
+              <a:rPr>
+                <a:solidFill>
+                  <a:srgbClr val="003B4F"/>
+                </a:solidFill>
+                <a:latin typeface="Courier"/>
+              </a:rPr>
+              <a:t>, </a:t>
+            </a:r>
+            <a:r>
+              <a:rPr>
+                <a:solidFill>
+                  <a:srgbClr val="20794D"/>
+                </a:solidFill>
+                <a:latin typeface="Courier"/>
+              </a:rPr>
+              <a:t>"B"</a:t>
+            </a:r>
+            <a:r>
+              <a:rPr>
+                <a:solidFill>
+                  <a:srgbClr val="003B4F"/>
+                </a:solidFill>
+                <a:latin typeface="Courier"/>
+              </a:rPr>
+              <a:t>, </a:t>
+            </a:r>
+            <a:r>
+              <a:rPr>
+                <a:solidFill>
+                  <a:srgbClr val="20794D"/>
+                </a:solidFill>
+                <a:latin typeface="Courier"/>
+              </a:rPr>
+              <a:t>"C"</a:t>
+            </a:r>
+            <a:r>
+              <a:rPr>
+                <a:solidFill>
+                  <a:srgbClr val="003B4F"/>
+                </a:solidFill>
+                <a:latin typeface="Courier"/>
+              </a:rPr>
+              <a:t>, </a:t>
+            </a:r>
+            <a:r>
+              <a:rPr>
+                <a:solidFill>
+                  <a:srgbClr val="20794D"/>
+                </a:solidFill>
+                <a:latin typeface="Courier"/>
+              </a:rPr>
+              <a:t>"D"</a:t>
+            </a:r>
+            <a:r>
+              <a:rPr>
+                <a:solidFill>
+                  <a:srgbClr val="003B4F"/>
+                </a:solidFill>
+                <a:latin typeface="Courier"/>
+              </a:rPr>
+              <a:t>),</a:t>
+            </a:r>
+            <a:br/>
+            <a:r>
+              <a:rPr>
+                <a:solidFill>
+                  <a:srgbClr val="003B4F"/>
+                </a:solidFill>
+                <a:latin typeface="Courier"/>
+              </a:rPr>
+              <a:t>  </a:t>
+            </a:r>
+            <a:r>
+              <a:rPr>
+                <a:solidFill>
+                  <a:srgbClr val="657422"/>
+                </a:solidFill>
+                <a:latin typeface="Courier"/>
+              </a:rPr>
+              <a:t>count =</a:t>
+            </a:r>
+            <a:r>
+              <a:rPr>
+                <a:solidFill>
+                  <a:srgbClr val="003B4F"/>
+                </a:solidFill>
+                <a:latin typeface="Courier"/>
+              </a:rPr>
+              <a:t> </a:t>
+            </a:r>
+            <a:r>
+              <a:rPr>
+                <a:solidFill>
+                  <a:srgbClr val="4758AB"/>
+                </a:solidFill>
+                <a:latin typeface="Courier"/>
+              </a:rPr>
+              <a:t>c</a:t>
+            </a:r>
+            <a:r>
+              <a:rPr>
+                <a:solidFill>
+                  <a:srgbClr val="003B4F"/>
+                </a:solidFill>
+                <a:latin typeface="Courier"/>
+              </a:rPr>
+              <a:t>(</a:t>
+            </a:r>
+            <a:r>
+              <a:rPr>
+                <a:solidFill>
+                  <a:srgbClr val="AD0000"/>
+                </a:solidFill>
+                <a:latin typeface="Courier"/>
+              </a:rPr>
+              <a:t>12</a:t>
+            </a:r>
+            <a:r>
+              <a:rPr>
+                <a:solidFill>
+                  <a:srgbClr val="003B4F"/>
+                </a:solidFill>
+                <a:latin typeface="Courier"/>
+              </a:rPr>
+              <a:t>, </a:t>
+            </a:r>
+            <a:r>
+              <a:rPr>
+                <a:solidFill>
+                  <a:srgbClr val="8F5902"/>
+                </a:solidFill>
+                <a:latin typeface="Courier"/>
+              </a:rPr>
+              <a:t>NA</a:t>
+            </a:r>
+            <a:r>
+              <a:rPr>
+                <a:solidFill>
+                  <a:srgbClr val="003B4F"/>
+                </a:solidFill>
+                <a:latin typeface="Courier"/>
+              </a:rPr>
+              <a:t>, </a:t>
+            </a:r>
+            <a:r>
+              <a:rPr>
+                <a:solidFill>
+                  <a:srgbClr val="AD0000"/>
+                </a:solidFill>
+                <a:latin typeface="Courier"/>
+              </a:rPr>
+              <a:t>8</a:t>
+            </a:r>
+            <a:r>
+              <a:rPr>
+                <a:solidFill>
+                  <a:srgbClr val="003B4F"/>
+                </a:solidFill>
+                <a:latin typeface="Courier"/>
+              </a:rPr>
+              <a:t>, </a:t>
+            </a:r>
+            <a:r>
+              <a:rPr>
+                <a:solidFill>
+                  <a:srgbClr val="8F5902"/>
+                </a:solidFill>
+                <a:latin typeface="Courier"/>
+              </a:rPr>
+              <a:t>NA</a:t>
+            </a:r>
+            <a:r>
+              <a:rPr>
+                <a:solidFill>
+                  <a:srgbClr val="003B4F"/>
+                </a:solidFill>
+                <a:latin typeface="Courier"/>
+              </a:rPr>
+              <a:t>)</a:t>
+            </a:r>
+            <a:br/>
+            <a:r>
+              <a:rPr>
+                <a:solidFill>
+                  <a:srgbClr val="003B4F"/>
+                </a:solidFill>
+                <a:latin typeface="Courier"/>
+              </a:rPr>
+              <a:t>)</a:t>
+            </a:r>
+            <a:br/>
+            <a:br/>
+            <a:r>
+              <a:rPr>
+                <a:solidFill>
+                  <a:srgbClr val="003B4F"/>
+                </a:solidFill>
+                <a:latin typeface="Courier"/>
+              </a:rPr>
+              <a:t>survey_df </a:t>
+            </a:r>
+            <a:r>
+              <a:rPr>
+                <a:solidFill>
+                  <a:srgbClr val="5E5E5E"/>
+                </a:solidFill>
+                <a:latin typeface="Courier"/>
+              </a:rPr>
+              <a:t>|&gt;</a:t>
+            </a:r>
+            <a:r>
+              <a:rPr>
+                <a:solidFill>
+                  <a:srgbClr val="003B4F"/>
+                </a:solidFill>
+                <a:latin typeface="Courier"/>
+              </a:rPr>
+              <a:t> </a:t>
+            </a:r>
+            <a:r>
+              <a:rPr>
+                <a:solidFill>
+                  <a:srgbClr val="4758AB"/>
+                </a:solidFill>
+                <a:latin typeface="Courier"/>
+              </a:rPr>
+              <a:t>filter</a:t>
+            </a:r>
+            <a:r>
+              <a:rPr>
+                <a:solidFill>
+                  <a:srgbClr val="003B4F"/>
+                </a:solidFill>
+                <a:latin typeface="Courier"/>
+              </a:rPr>
+              <a:t>(</a:t>
+            </a:r>
+            <a:r>
+              <a:rPr>
+                <a:solidFill>
+                  <a:srgbClr val="4758AB"/>
+                </a:solidFill>
+                <a:latin typeface="Courier"/>
+              </a:rPr>
+              <a:t>is.na</a:t>
+            </a:r>
+            <a:r>
+              <a:rPr>
+                <a:solidFill>
+                  <a:srgbClr val="003B4F"/>
+                </a:solidFill>
+                <a:latin typeface="Courier"/>
+              </a:rPr>
+              <a:t>(count))</a:t>
+            </a:r>
+            <a:br/>
+            <a:r>
+              <a:rPr>
+                <a:solidFill>
+                  <a:srgbClr val="003B4F"/>
+                </a:solidFill>
+                <a:latin typeface="Courier"/>
+              </a:rPr>
+              <a:t>survey_df </a:t>
+            </a:r>
+            <a:r>
+              <a:rPr>
+                <a:solidFill>
+                  <a:srgbClr val="5E5E5E"/>
+                </a:solidFill>
+                <a:latin typeface="Courier"/>
+              </a:rPr>
+              <a:t>|&gt;</a:t>
+            </a:r>
+            <a:r>
+              <a:rPr>
+                <a:solidFill>
+                  <a:srgbClr val="003B4F"/>
+                </a:solidFill>
+                <a:latin typeface="Courier"/>
+              </a:rPr>
+              <a:t> </a:t>
+            </a:r>
+            <a:r>
+              <a:rPr>
+                <a:solidFill>
+                  <a:srgbClr val="4758AB"/>
+                </a:solidFill>
+                <a:latin typeface="Courier"/>
+              </a:rPr>
+              <a:t>filter</a:t>
+            </a:r>
+            <a:r>
+              <a:rPr>
+                <a:solidFill>
+                  <a:srgbClr val="003B4F"/>
+                </a:solidFill>
+                <a:latin typeface="Courier"/>
+              </a:rPr>
+              <a:t>(</a:t>
+            </a:r>
+            <a:r>
+              <a:rPr>
+                <a:solidFill>
+                  <a:srgbClr val="5E5E5E"/>
+                </a:solidFill>
+                <a:latin typeface="Courier"/>
+              </a:rPr>
+              <a:t>!</a:t>
+            </a:r>
+            <a:r>
+              <a:rPr>
+                <a:solidFill>
+                  <a:srgbClr val="4758AB"/>
+                </a:solidFill>
+                <a:latin typeface="Courier"/>
+              </a:rPr>
+              <a:t>is.na</a:t>
+            </a:r>
+            <a:r>
+              <a:rPr>
+                <a:solidFill>
+                  <a:srgbClr val="003B4F"/>
+                </a:solidFill>
+                <a:latin typeface="Courier"/>
+              </a:rPr>
+              <a:t>(count))</a:t>
+            </a:r>
+          </a:p>
+          <a:p>
+            <a:pPr lvl="0" indent="0" marL="0">
+              <a:buNone/>
+            </a:pPr>
+            <a:r>
+              <a:rPr/>
+              <a:t>✏️ </a:t>
+            </a:r>
+            <a:r>
+              <a:rPr b="1"/>
+              <a:t>Your turn:</a:t>
+            </a:r>
+            <a:r>
+              <a:rPr/>
               <a:t> Write a </a:t>
             </a:r>
             <a:r>
               <a:rPr>
                 <a:latin typeface="Courier"/>
               </a:rPr>
-              <a:t>select()</a:t>
-            </a:r>
-            <a:r>
-              <a:rPr/>
-              <a:t> that keeps every column </a:t>
-            </a:r>
-            <a:r>
-              <a:rPr i="1"/>
-              <a:t>except</a:t>
-            </a:r>
-            <a:r>
-              <a:rPr/>
-              <a:t> </a:t>
-            </a:r>
-            <a:r>
-              <a:rPr>
-                <a:latin typeface="Courier"/>
-              </a:rPr>
-              <a:t>tree_no</a:t>
+              <a:t>filter()</a:t>
+            </a:r>
+            <a:r>
+              <a:rPr/>
+              <a:t> on </a:t>
+            </a:r>
+            <a:r>
+              <a:rPr>
+                <a:latin typeface="Courier"/>
+              </a:rPr>
+              <a:t>pine_csv_df</a:t>
+            </a:r>
+            <a:r>
+              <a:rPr/>
+              <a:t> that keeps windward (</a:t>
+            </a:r>
+            <a:r>
+              <a:rPr>
+                <a:latin typeface="Courier"/>
+              </a:rPr>
+              <a:t>wind == "wind"</a:t>
+            </a:r>
+            <a:r>
+              <a:rPr/>
+              <a:t>) needles </a:t>
+            </a:r>
+            <a:r>
+              <a:rPr b="1"/>
+              <a:t>that are also</a:t>
+            </a:r>
+            <a:r>
+              <a:rPr/>
+              <a:t> longer than 14mm — think about whether you need </a:t>
+            </a:r>
+            <a:r>
+              <a:rPr>
+                <a:latin typeface="Courier"/>
+              </a:rPr>
+              <a:t>,</a:t>
+            </a:r>
+            <a:r>
+              <a:rPr/>
+              <a:t>/</a:t>
+            </a:r>
+            <a:r>
+              <a:rPr>
+                <a:latin typeface="Courier"/>
+              </a:rPr>
+              <a:t>&amp;</a:t>
+            </a:r>
+            <a:r>
+              <a:rPr/>
+              <a:t> or </a:t>
+            </a:r>
+            <a:r>
+              <a:rPr>
+                <a:latin typeface="Courier"/>
+              </a:rPr>
+              <a:t>|</a:t>
             </a:r>
             <a:r>
               <a:rPr/>
@@ -5324,17 +7187,17 @@
             </a:pPr>
             <a:r>
               <a:rPr/>
-              <a:t>Part 4 · </a:t>
-            </a:r>
-            <a:r>
-              <a:rPr>
-                <a:latin typeface="Courier"/>
-              </a:rPr>
-              <a:t>mutate()</a:t>
-            </a:r>
-            <a:r>
-              <a:rPr/>
-              <a:t> — new and changed columns</a:t>
+              <a:t>Part 3 · </a:t>
+            </a:r>
+            <a:r>
+              <a:rPr>
+                <a:latin typeface="Courier"/>
+              </a:rPr>
+              <a:t>select()</a:t>
+            </a:r>
+            <a:r>
+              <a:rPr/>
+              <a:t> — picking columns</a:t>
             </a:r>
           </a:p>
         </p:txBody>
@@ -5384,6 +7247,69 @@
               </a:rPr>
               <a:t>|&gt;</a:t>
             </a:r>
+            <a:r>
+              <a:rPr>
+                <a:solidFill>
+                  <a:srgbClr val="003B4F"/>
+                </a:solidFill>
+                <a:latin typeface="Courier"/>
+              </a:rPr>
+              <a:t> </a:t>
+            </a:r>
+            <a:r>
+              <a:rPr>
+                <a:solidFill>
+                  <a:srgbClr val="4758AB"/>
+                </a:solidFill>
+                <a:latin typeface="Courier"/>
+              </a:rPr>
+              <a:t>select</a:t>
+            </a:r>
+            <a:r>
+              <a:rPr>
+                <a:solidFill>
+                  <a:srgbClr val="003B4F"/>
+                </a:solidFill>
+                <a:latin typeface="Courier"/>
+              </a:rPr>
+              <a:t>(n_s, length_mm) </a:t>
+            </a:r>
+            <a:r>
+              <a:rPr>
+                <a:solidFill>
+                  <a:srgbClr val="5E5E5E"/>
+                </a:solidFill>
+                <a:latin typeface="Courier"/>
+              </a:rPr>
+              <a:t>|&gt;</a:t>
+            </a:r>
+            <a:r>
+              <a:rPr>
+                <a:solidFill>
+                  <a:srgbClr val="003B4F"/>
+                </a:solidFill>
+                <a:latin typeface="Courier"/>
+              </a:rPr>
+              <a:t> </a:t>
+            </a:r>
+            <a:r>
+              <a:rPr>
+                <a:solidFill>
+                  <a:srgbClr val="4758AB"/>
+                </a:solidFill>
+                <a:latin typeface="Courier"/>
+              </a:rPr>
+              <a:t>head</a:t>
+            </a:r>
+            <a:r>
+              <a:rPr>
+                <a:solidFill>
+                  <a:srgbClr val="003B4F"/>
+                </a:solidFill>
+                <a:latin typeface="Courier"/>
+              </a:rPr>
+              <a:t>()</a:t>
+            </a:r>
             <a:br/>
             <a:r>
               <a:rPr>
@@ -5392,7 +7318,25 @@
                 </a:solidFill>
                 <a:latin typeface="Courier"/>
               </a:rPr>
-              <a:t>  </a:t>
+              <a:t>pine_csv_df </a:t>
+            </a:r>
+            <a:r>
+              <a:rPr>
+                <a:solidFill>
+                  <a:srgbClr val="5E5E5E"/>
+                </a:solidFill>
+                <a:latin typeface="Courier"/>
+              </a:rPr>
+              <a:t>|&gt;</a:t>
+            </a:r>
+            <a:r>
+              <a:rPr>
+                <a:solidFill>
+                  <a:srgbClr val="003B4F"/>
+                </a:solidFill>
+                <a:latin typeface="Courier"/>
+              </a:rPr>
+              <a:t> </a:t>
             </a:r>
             <a:r>
               <a:rPr>
@@ -5401,7 +7345,7 @@
                 </a:solidFill>
                 <a:latin typeface="Courier"/>
               </a:rPr>
-              <a:t>mutate</a:t>
+              <a:t>select</a:t>
             </a:r>
             <a:r>
               <a:rPr>
@@ -5415,29 +7359,29 @@
             <a:r>
               <a:rPr>
                 <a:solidFill>
-                  <a:srgbClr val="657422"/>
-                </a:solidFill>
-                <a:latin typeface="Courier"/>
-              </a:rPr>
-              <a:t>length_cm =</a:t>
-            </a:r>
-            <a:r>
-              <a:rPr>
-                <a:solidFill>
-                  <a:srgbClr val="003B4F"/>
-                </a:solidFill>
-                <a:latin typeface="Courier"/>
-              </a:rPr>
-              <a:t> length_mm </a:t>
-            </a:r>
-            <a:r>
-              <a:rPr>
-                <a:solidFill>
                   <a:srgbClr val="5E5E5E"/>
                 </a:solidFill>
                 <a:latin typeface="Courier"/>
               </a:rPr>
-              <a:t>/</a:t>
+              <a:t>-</a:t>
+            </a:r>
+            <a:r>
+              <a:rPr>
+                <a:solidFill>
+                  <a:srgbClr val="003B4F"/>
+                </a:solidFill>
+                <a:latin typeface="Courier"/>
+              </a:rPr>
+              <a:t>date) </a:t>
+            </a:r>
+            <a:r>
+              <a:rPr>
+                <a:solidFill>
+                  <a:srgbClr val="5E5E5E"/>
+                </a:solidFill>
+                <a:latin typeface="Courier"/>
+              </a:rPr>
+              <a:t>|&gt;</a:t>
             </a:r>
             <a:r>
               <a:rPr>
@@ -5447,164 +7391,6 @@
                 <a:latin typeface="Courier"/>
               </a:rPr>
               <a:t> </a:t>
-            </a:r>
-            <a:r>
-              <a:rPr>
-                <a:solidFill>
-                  <a:srgbClr val="AD0000"/>
-                </a:solidFill>
-                <a:latin typeface="Courier"/>
-              </a:rPr>
-              <a:t>10</a:t>
-            </a:r>
-            <a:r>
-              <a:rPr>
-                <a:solidFill>
-                  <a:srgbClr val="003B4F"/>
-                </a:solidFill>
-                <a:latin typeface="Courier"/>
-              </a:rPr>
-              <a:t>) </a:t>
-            </a:r>
-            <a:r>
-              <a:rPr>
-                <a:solidFill>
-                  <a:srgbClr val="5E5E5E"/>
-                </a:solidFill>
-                <a:latin typeface="Courier"/>
-              </a:rPr>
-              <a:t>|&gt;</a:t>
-            </a:r>
-            <a:br/>
-            <a:r>
-              <a:rPr>
-                <a:solidFill>
-                  <a:srgbClr val="003B4F"/>
-                </a:solidFill>
-                <a:latin typeface="Courier"/>
-              </a:rPr>
-              <a:t>  </a:t>
-            </a:r>
-            <a:r>
-              <a:rPr>
-                <a:solidFill>
-                  <a:srgbClr val="4758AB"/>
-                </a:solidFill>
-                <a:latin typeface="Courier"/>
-              </a:rPr>
-              <a:t>head</a:t>
-            </a:r>
-            <a:r>
-              <a:rPr>
-                <a:solidFill>
-                  <a:srgbClr val="003B4F"/>
-                </a:solidFill>
-                <a:latin typeface="Courier"/>
-              </a:rPr>
-              <a:t>()</a:t>
-            </a:r>
-            <a:br/>
-            <a:br/>
-            <a:r>
-              <a:rPr>
-                <a:solidFill>
-                  <a:srgbClr val="003B4F"/>
-                </a:solidFill>
-                <a:latin typeface="Courier"/>
-              </a:rPr>
-              <a:t>pine_csv_df </a:t>
-            </a:r>
-            <a:r>
-              <a:rPr>
-                <a:solidFill>
-                  <a:srgbClr val="5E5E5E"/>
-                </a:solidFill>
-                <a:latin typeface="Courier"/>
-              </a:rPr>
-              <a:t>|&gt;</a:t>
-            </a:r>
-            <a:br/>
-            <a:r>
-              <a:rPr>
-                <a:solidFill>
-                  <a:srgbClr val="003B4F"/>
-                </a:solidFill>
-                <a:latin typeface="Courier"/>
-              </a:rPr>
-              <a:t>  </a:t>
-            </a:r>
-            <a:r>
-              <a:rPr>
-                <a:solidFill>
-                  <a:srgbClr val="4758AB"/>
-                </a:solidFill>
-                <a:latin typeface="Courier"/>
-              </a:rPr>
-              <a:t>mutate</a:t>
-            </a:r>
-            <a:r>
-              <a:rPr>
-                <a:solidFill>
-                  <a:srgbClr val="003B4F"/>
-                </a:solidFill>
-                <a:latin typeface="Courier"/>
-              </a:rPr>
-              <a:t>(</a:t>
-            </a:r>
-            <a:r>
-              <a:rPr>
-                <a:solidFill>
-                  <a:srgbClr val="657422"/>
-                </a:solidFill>
-                <a:latin typeface="Courier"/>
-              </a:rPr>
-              <a:t>log_length =</a:t>
-            </a:r>
-            <a:r>
-              <a:rPr>
-                <a:solidFill>
-                  <a:srgbClr val="003B4F"/>
-                </a:solidFill>
-                <a:latin typeface="Courier"/>
-              </a:rPr>
-              <a:t> </a:t>
-            </a:r>
-            <a:r>
-              <a:rPr>
-                <a:solidFill>
-                  <a:srgbClr val="4758AB"/>
-                </a:solidFill>
-                <a:latin typeface="Courier"/>
-              </a:rPr>
-              <a:t>log</a:t>
-            </a:r>
-            <a:r>
-              <a:rPr>
-                <a:solidFill>
-                  <a:srgbClr val="003B4F"/>
-                </a:solidFill>
-                <a:latin typeface="Courier"/>
-              </a:rPr>
-              <a:t>(length_mm)) </a:t>
-            </a:r>
-            <a:r>
-              <a:rPr>
-                <a:solidFill>
-                  <a:srgbClr val="5E5E5E"/>
-                </a:solidFill>
-                <a:latin typeface="Courier"/>
-              </a:rPr>
-              <a:t>|&gt;</a:t>
-            </a:r>
-            <a:br/>
-            <a:r>
-              <a:rPr>
-                <a:solidFill>
-                  <a:srgbClr val="003B4F"/>
-                </a:solidFill>
-                <a:latin typeface="Courier"/>
-              </a:rPr>
-              <a:t>  </a:t>
             </a:r>
             <a:r>
               <a:rPr>
@@ -5639,53 +7425,31 @@
             </a:r>
             <a:r>
               <a:rPr/>
-              <a:t> Add a column called </a:t>
-            </a:r>
-            <a:r>
-              <a:rPr>
-                <a:latin typeface="Courier"/>
-              </a:rPr>
-              <a:t>size_class</a:t>
-            </a:r>
-            <a:r>
-              <a:rPr/>
-              <a:t> that is </a:t>
-            </a:r>
-            <a:r>
-              <a:rPr>
-                <a:latin typeface="Courier"/>
-              </a:rPr>
-              <a:t>"long"</a:t>
-            </a:r>
-            <a:r>
-              <a:rPr/>
-              <a:t> when </a:t>
-            </a:r>
-            <a:r>
-              <a:rPr>
-                <a:latin typeface="Courier"/>
-              </a:rPr>
-              <a:t>length_mm &gt; 18</a:t>
-            </a:r>
-            <a:r>
-              <a:rPr/>
-              <a:t> and </a:t>
-            </a:r>
-            <a:r>
-              <a:rPr>
-                <a:latin typeface="Courier"/>
-              </a:rPr>
-              <a:t>"short"</a:t>
-            </a:r>
-            <a:r>
-              <a:rPr/>
-              <a:t> otherwise. Use </a:t>
-            </a:r>
-            <a:r>
-              <a:rPr>
-                <a:latin typeface="Courier"/>
-              </a:rPr>
-              <a:t>if_else()</a:t>
+              <a:t> Write a </a:t>
+            </a:r>
+            <a:r>
+              <a:rPr>
+                <a:latin typeface="Courier"/>
+              </a:rPr>
+              <a:t>select()</a:t>
+            </a:r>
+            <a:r>
+              <a:rPr/>
+              <a:t> that keeps every column </a:t>
+            </a:r>
+            <a:r>
+              <a:rPr i="1"/>
+              <a:t>except</a:t>
+            </a:r>
+            <a:r>
+              <a:rPr/>
+              <a:t> </a:t>
+            </a:r>
+            <a:r>
+              <a:rPr>
+                <a:latin typeface="Courier"/>
+              </a:rPr>
+              <a:t>tree_no</a:t>
             </a:r>
             <a:r>
               <a:rPr/>
@@ -5704,87 +7468,6 @@
                 <a:latin typeface="Courier"/>
               </a:rPr>
               <a:t># Write your code here:</a:t>
-            </a:r>
-          </a:p>
-          <a:p>
-            <a:pPr lvl="0" indent="0" marL="0">
-              <a:buNone/>
-            </a:pPr>
-            <a:r>
-              <a:rPr/>
-              <a:t>✏️ </a:t>
-            </a:r>
-            <a:r>
-              <a:rPr b="1"/>
-              <a:t>Your turn:</a:t>
-            </a:r>
-            <a:r>
-              <a:rPr/>
-              <a:t> Does </a:t>
-            </a:r>
-            <a:r>
-              <a:rPr>
-                <a:latin typeface="Courier"/>
-              </a:rPr>
-              <a:t>mutate()</a:t>
-            </a:r>
-            <a:r>
-              <a:rPr/>
-              <a:t> change how many </a:t>
-            </a:r>
-            <a:r>
-              <a:rPr i="1"/>
-              <a:t>rows</a:t>
-            </a:r>
-            <a:r>
-              <a:rPr/>
-              <a:t> your data frame has? How many </a:t>
-            </a:r>
-            <a:r>
-              <a:rPr i="1"/>
-              <a:t>columns</a:t>
-            </a:r>
-            <a:r>
-              <a:rPr/>
-              <a:t> did each example above add? </a:t>
-            </a:r>
-            <a:r>
-              <a:rPr>
-                <a:latin typeface="Courier"/>
-              </a:rPr>
-              <a:t>________________________</a:t>
-            </a:r>
-          </a:p>
-          <a:p>
-            <a:pPr lvl="0" indent="0" marL="1270000">
-              <a:buNone/>
-            </a:pPr>
-            <a:r>
-              <a:rPr sz="2000" b="1"/>
-              <a:t>Tip</a:t>
-            </a:r>
-          </a:p>
-          <a:p>
-            <a:pPr lvl="0" indent="0" marL="1270000">
-              <a:buNone/>
-            </a:pPr>
-            <a:r>
-              <a:rPr sz="2000" b="1"/>
-              <a:t>🚀 If you finish early:</a:t>
-            </a:r>
-            <a:r>
-              <a:rPr sz="2000"/>
-              <a:t> Add a second transformed column — a square-root transform (</a:t>
-            </a:r>
-            <a:r>
-              <a:rPr sz="2000">
-                <a:latin typeface="Courier"/>
-              </a:rPr>
-              <a:t>sqrt(length_mm)</a:t>
-            </a:r>
-            <a:r>
-              <a:rPr sz="2000"/>
-              <a:t>) alongside your log transform. Which one looks like it changes the spread of the values more?</a:t>
             </a:r>
           </a:p>
         </p:txBody>
@@ -5836,17 +7519,17 @@
             </a:pPr>
             <a:r>
               <a:rPr/>
-              <a:t>Part 5 · </a:t>
-            </a:r>
-            <a:r>
-              <a:rPr>
-                <a:latin typeface="Courier"/>
-              </a:rPr>
-              <a:t>arrange()</a:t>
-            </a:r>
-            <a:r>
-              <a:rPr/>
-              <a:t> — sorting rows</a:t>
+              <a:t>Part 4 · </a:t>
+            </a:r>
+            <a:r>
+              <a:rPr>
+                <a:latin typeface="Courier"/>
+              </a:rPr>
+              <a:t>mutate()</a:t>
+            </a:r>
+            <a:r>
+              <a:rPr/>
+              <a:t> — new and changed columns</a:t>
             </a:r>
           </a:p>
         </p:txBody>
@@ -5896,6 +7579,61 @@
               </a:rPr>
               <a:t>|&gt;</a:t>
             </a:r>
+            <a:br/>
+            <a:r>
+              <a:rPr>
+                <a:solidFill>
+                  <a:srgbClr val="003B4F"/>
+                </a:solidFill>
+                <a:latin typeface="Courier"/>
+              </a:rPr>
+              <a:t>  </a:t>
+            </a:r>
+            <a:r>
+              <a:rPr>
+                <a:solidFill>
+                  <a:srgbClr val="4758AB"/>
+                </a:solidFill>
+                <a:latin typeface="Courier"/>
+              </a:rPr>
+              <a:t>mutate</a:t>
+            </a:r>
+            <a:r>
+              <a:rPr>
+                <a:solidFill>
+                  <a:srgbClr val="003B4F"/>
+                </a:solidFill>
+                <a:latin typeface="Courier"/>
+              </a:rPr>
+              <a:t>(</a:t>
+            </a:r>
+            <a:r>
+              <a:rPr>
+                <a:solidFill>
+                  <a:srgbClr val="657422"/>
+                </a:solidFill>
+                <a:latin typeface="Courier"/>
+              </a:rPr>
+              <a:t>length_cm =</a:t>
+            </a:r>
+            <a:r>
+              <a:rPr>
+                <a:solidFill>
+                  <a:srgbClr val="003B4F"/>
+                </a:solidFill>
+                <a:latin typeface="Courier"/>
+              </a:rPr>
+              <a:t> length_mm </a:t>
+            </a:r>
+            <a:r>
+              <a:rPr>
+                <a:solidFill>
+                  <a:srgbClr val="5E5E5E"/>
+                </a:solidFill>
+                <a:latin typeface="Courier"/>
+              </a:rPr>
+              <a:t>/</a:t>
+            </a:r>
             <a:r>
               <a:rPr>
                 <a:solidFill>
@@ -5908,22 +7646,60 @@
             <a:r>
               <a:rPr>
                 <a:solidFill>
+                  <a:srgbClr val="AD0000"/>
+                </a:solidFill>
+                <a:latin typeface="Courier"/>
+              </a:rPr>
+              <a:t>10</a:t>
+            </a:r>
+            <a:r>
+              <a:rPr>
+                <a:solidFill>
+                  <a:srgbClr val="003B4F"/>
+                </a:solidFill>
+                <a:latin typeface="Courier"/>
+              </a:rPr>
+              <a:t>) </a:t>
+            </a:r>
+            <a:r>
+              <a:rPr>
+                <a:solidFill>
+                  <a:srgbClr val="5E5E5E"/>
+                </a:solidFill>
+                <a:latin typeface="Courier"/>
+              </a:rPr>
+              <a:t>|&gt;</a:t>
+            </a:r>
+            <a:br/>
+            <a:r>
+              <a:rPr>
+                <a:solidFill>
+                  <a:srgbClr val="003B4F"/>
+                </a:solidFill>
+                <a:latin typeface="Courier"/>
+              </a:rPr>
+              <a:t>  </a:t>
+            </a:r>
+            <a:r>
+              <a:rPr>
+                <a:solidFill>
                   <a:srgbClr val="4758AB"/>
                 </a:solidFill>
                 <a:latin typeface="Courier"/>
               </a:rPr>
-              <a:t>arrange</a:t>
-            </a:r>
-            <a:r>
-              <a:rPr>
-                <a:solidFill>
-                  <a:srgbClr val="003B4F"/>
-                </a:solidFill>
-                <a:latin typeface="Courier"/>
-              </a:rPr>
-              <a:t>(length_mm)</a:t>
+              <a:t>head</a:t>
+            </a:r>
+            <a:r>
+              <a:rPr>
+                <a:solidFill>
+                  <a:srgbClr val="003B4F"/>
+                </a:solidFill>
+                <a:latin typeface="Courier"/>
+              </a:rPr>
+              <a:t>()</a:t>
             </a:r>
             <a:br/>
+            <a:br/>
             <a:r>
               <a:rPr>
                 <a:solidFill>
@@ -5942,6 +7718,43 @@
               </a:rPr>
               <a:t>|&gt;</a:t>
             </a:r>
+            <a:br/>
+            <a:r>
+              <a:rPr>
+                <a:solidFill>
+                  <a:srgbClr val="003B4F"/>
+                </a:solidFill>
+                <a:latin typeface="Courier"/>
+              </a:rPr>
+              <a:t>  </a:t>
+            </a:r>
+            <a:r>
+              <a:rPr>
+                <a:solidFill>
+                  <a:srgbClr val="4758AB"/>
+                </a:solidFill>
+                <a:latin typeface="Courier"/>
+              </a:rPr>
+              <a:t>mutate</a:t>
+            </a:r>
+            <a:r>
+              <a:rPr>
+                <a:solidFill>
+                  <a:srgbClr val="003B4F"/>
+                </a:solidFill>
+                <a:latin typeface="Courier"/>
+              </a:rPr>
+              <a:t>(</a:t>
+            </a:r>
+            <a:r>
+              <a:rPr>
+                <a:solidFill>
+                  <a:srgbClr val="657422"/>
+                </a:solidFill>
+                <a:latin typeface="Courier"/>
+              </a:rPr>
+              <a:t>log_length =</a:t>
+            </a:r>
             <a:r>
               <a:rPr>
                 <a:solidFill>
@@ -5958,16 +7771,35 @@
                 </a:solidFill>
                 <a:latin typeface="Courier"/>
               </a:rPr>
-              <a:t>arrange</a:t>
-            </a:r>
-            <a:r>
-              <a:rPr>
-                <a:solidFill>
-                  <a:srgbClr val="003B4F"/>
-                </a:solidFill>
-                <a:latin typeface="Courier"/>
-              </a:rPr>
-              <a:t>(</a:t>
+              <a:t>log</a:t>
+            </a:r>
+            <a:r>
+              <a:rPr>
+                <a:solidFill>
+                  <a:srgbClr val="003B4F"/>
+                </a:solidFill>
+                <a:latin typeface="Courier"/>
+              </a:rPr>
+              <a:t>(length_mm)) </a:t>
+            </a:r>
+            <a:r>
+              <a:rPr>
+                <a:solidFill>
+                  <a:srgbClr val="5E5E5E"/>
+                </a:solidFill>
+                <a:latin typeface="Courier"/>
+              </a:rPr>
+              <a:t>|&gt;</a:t>
+            </a:r>
+            <a:br/>
+            <a:r>
+              <a:rPr>
+                <a:solidFill>
+                  <a:srgbClr val="003B4F"/>
+                </a:solidFill>
+                <a:latin typeface="Courier"/>
+              </a:rPr>
+              <a:t>  </a:t>
             </a:r>
             <a:r>
               <a:rPr>
@@ -5976,16 +7808,16 @@
                 </a:solidFill>
                 <a:latin typeface="Courier"/>
               </a:rPr>
-              <a:t>desc</a:t>
-            </a:r>
-            <a:r>
-              <a:rPr>
-                <a:solidFill>
-                  <a:srgbClr val="003B4F"/>
-                </a:solidFill>
-                <a:latin typeface="Courier"/>
-              </a:rPr>
-              <a:t>(length_mm))</a:t>
+              <a:t>head</a:t>
+            </a:r>
+            <a:r>
+              <a:rPr>
+                <a:solidFill>
+                  <a:srgbClr val="003B4F"/>
+                </a:solidFill>
+                <a:latin typeface="Courier"/>
+              </a:rPr>
+              <a:t>()</a:t>
             </a:r>
           </a:p>
           <a:p>
@@ -6002,27 +7834,57 @@
             </a:r>
             <a:r>
               <a:rPr/>
-              <a:t> Sort the data by </a:t>
-            </a:r>
-            <a:r>
-              <a:rPr>
-                <a:latin typeface="Courier"/>
-              </a:rPr>
-              <a:t>n_s</a:t>
-            </a:r>
-            <a:r>
-              <a:rPr/>
-              <a:t>, and within each side, by </a:t>
-            </a:r>
-            <a:r>
-              <a:rPr>
-                <a:latin typeface="Courier"/>
-              </a:rPr>
-              <a:t>length_mm</a:t>
-            </a:r>
-            <a:r>
-              <a:rPr/>
-              <a:t> from longest to shortest.</a:t>
+              <a:t> Add a column called </a:t>
+            </a:r>
+            <a:r>
+              <a:rPr>
+                <a:latin typeface="Courier"/>
+              </a:rPr>
+              <a:t>size_class</a:t>
+            </a:r>
+            <a:r>
+              <a:rPr/>
+              <a:t> that is </a:t>
+            </a:r>
+            <a:r>
+              <a:rPr>
+                <a:latin typeface="Courier"/>
+              </a:rPr>
+              <a:t>"long"</a:t>
+            </a:r>
+            <a:r>
+              <a:rPr/>
+              <a:t> when </a:t>
+            </a:r>
+            <a:r>
+              <a:rPr>
+                <a:latin typeface="Courier"/>
+              </a:rPr>
+              <a:t>length_mm &gt; 18</a:t>
+            </a:r>
+            <a:r>
+              <a:rPr/>
+              <a:t> and </a:t>
+            </a:r>
+            <a:r>
+              <a:rPr>
+                <a:latin typeface="Courier"/>
+              </a:rPr>
+              <a:t>"short"</a:t>
+            </a:r>
+            <a:r>
+              <a:rPr/>
+              <a:t> otherwise. Use </a:t>
+            </a:r>
+            <a:r>
+              <a:rPr>
+                <a:latin typeface="Courier"/>
+              </a:rPr>
+              <a:t>if_else()</a:t>
+            </a:r>
+            <a:r>
+              <a:rPr/>
+              <a:t>.</a:t>
             </a:r>
           </a:p>
           <a:p>
@@ -6037,6 +7899,87 @@
                 <a:latin typeface="Courier"/>
               </a:rPr>
               <a:t># Write your code here:</a:t>
+            </a:r>
+          </a:p>
+          <a:p>
+            <a:pPr lvl="0" indent="0" marL="0">
+              <a:buNone/>
+            </a:pPr>
+            <a:r>
+              <a:rPr/>
+              <a:t>✏️ </a:t>
+            </a:r>
+            <a:r>
+              <a:rPr b="1"/>
+              <a:t>Your turn:</a:t>
+            </a:r>
+            <a:r>
+              <a:rPr/>
+              <a:t> Does </a:t>
+            </a:r>
+            <a:r>
+              <a:rPr>
+                <a:latin typeface="Courier"/>
+              </a:rPr>
+              <a:t>mutate()</a:t>
+            </a:r>
+            <a:r>
+              <a:rPr/>
+              <a:t> change how many </a:t>
+            </a:r>
+            <a:r>
+              <a:rPr i="1"/>
+              <a:t>rows</a:t>
+            </a:r>
+            <a:r>
+              <a:rPr/>
+              <a:t> your data frame has? How many </a:t>
+            </a:r>
+            <a:r>
+              <a:rPr i="1"/>
+              <a:t>columns</a:t>
+            </a:r>
+            <a:r>
+              <a:rPr/>
+              <a:t> did each example above add? </a:t>
+            </a:r>
+            <a:r>
+              <a:rPr>
+                <a:latin typeface="Courier"/>
+              </a:rPr>
+              <a:t>________________________</a:t>
+            </a:r>
+          </a:p>
+          <a:p>
+            <a:pPr lvl="0" indent="0" marL="1270000">
+              <a:buNone/>
+            </a:pPr>
+            <a:r>
+              <a:rPr sz="2000" b="1"/>
+              <a:t>Tip</a:t>
+            </a:r>
+          </a:p>
+          <a:p>
+            <a:pPr lvl="0" indent="0" marL="1270000">
+              <a:buNone/>
+            </a:pPr>
+            <a:r>
+              <a:rPr sz="2000" b="1"/>
+              <a:t>🚀 If you finish early:</a:t>
+            </a:r>
+            <a:r>
+              <a:rPr sz="2000"/>
+              <a:t> Add a second transformed column — a square-root transform (</a:t>
+            </a:r>
+            <a:r>
+              <a:rPr sz="2000">
+                <a:latin typeface="Courier"/>
+              </a:rPr>
+              <a:t>sqrt(length_mm)</a:t>
+            </a:r>
+            <a:r>
+              <a:rPr sz="2000"/>
+              <a:t>) alongside your log transform. Which one looks like it changes the spread of the values more?</a:t>
             </a:r>
           </a:p>
         </p:txBody>
@@ -6088,7 +8031,17 @@
             </a:pPr>
             <a:r>
               <a:rPr/>
-              <a:t>Part 6 · The full pipeline</a:t>
+              <a:t>Part 4b · </a:t>
+            </a:r>
+            <a:r>
+              <a:rPr>
+                <a:latin typeface="Courier"/>
+              </a:rPr>
+              <a:t>case_when()</a:t>
+            </a:r>
+            <a:r>
+              <a:rPr/>
+              <a:t> — recoding and binning</a:t>
             </a:r>
           </a:p>
         </p:txBody>
@@ -6127,7 +8080,7 @@
                 </a:solidFill>
                 <a:latin typeface="Courier"/>
               </a:rPr>
-              <a:t>pine_wrangled_df &lt;- pine_csv_df </a:t>
+              <a:t>pine_csv_df </a:t>
             </a:r>
             <a:r>
               <a:rPr>
@@ -6155,16 +8108,72 @@
                 </a:solidFill>
                 <a:latin typeface="Courier"/>
               </a:rPr>
-              <a:t>filter</a:t>
-            </a:r>
-            <a:r>
-              <a:rPr>
-                <a:solidFill>
-                  <a:srgbClr val="003B4F"/>
-                </a:solidFill>
-                <a:latin typeface="Courier"/>
-              </a:rPr>
-              <a:t>(length_mm </a:t>
+              <a:t>mutate</a:t>
+            </a:r>
+            <a:r>
+              <a:rPr>
+                <a:solidFill>
+                  <a:srgbClr val="003B4F"/>
+                </a:solidFill>
+                <a:latin typeface="Courier"/>
+              </a:rPr>
+              <a:t>(</a:t>
+            </a:r>
+            <a:br/>
+            <a:r>
+              <a:rPr>
+                <a:solidFill>
+                  <a:srgbClr val="003B4F"/>
+                </a:solidFill>
+                <a:latin typeface="Courier"/>
+              </a:rPr>
+              <a:t>    </a:t>
+            </a:r>
+            <a:r>
+              <a:rPr>
+                <a:solidFill>
+                  <a:srgbClr val="657422"/>
+                </a:solidFill>
+                <a:latin typeface="Courier"/>
+              </a:rPr>
+              <a:t>size_class =</a:t>
+            </a:r>
+            <a:r>
+              <a:rPr>
+                <a:solidFill>
+                  <a:srgbClr val="003B4F"/>
+                </a:solidFill>
+                <a:latin typeface="Courier"/>
+              </a:rPr>
+              <a:t> </a:t>
+            </a:r>
+            <a:r>
+              <a:rPr>
+                <a:solidFill>
+                  <a:srgbClr val="4758AB"/>
+                </a:solidFill>
+                <a:latin typeface="Courier"/>
+              </a:rPr>
+              <a:t>case_when</a:t>
+            </a:r>
+            <a:r>
+              <a:rPr>
+                <a:solidFill>
+                  <a:srgbClr val="003B4F"/>
+                </a:solidFill>
+                <a:latin typeface="Courier"/>
+              </a:rPr>
+              <a:t>(</a:t>
+            </a:r>
+            <a:br/>
+            <a:r>
+              <a:rPr>
+                <a:solidFill>
+                  <a:srgbClr val="003B4F"/>
+                </a:solidFill>
+                <a:latin typeface="Courier"/>
+              </a:rPr>
+              <a:t>      length_mm </a:t>
             </a:r>
             <a:r>
               <a:rPr>
@@ -6173,7 +8182,7 @@
                 </a:solidFill>
                 <a:latin typeface="Courier"/>
               </a:rPr>
-              <a:t>&gt;</a:t>
+              <a:t>&lt;</a:t>
             </a:r>
             <a:r>
               <a:rPr>
@@ -6191,16 +8200,16 @@
                 </a:solidFill>
                 <a:latin typeface="Courier"/>
               </a:rPr>
-              <a:t>0</a:t>
-            </a:r>
-            <a:r>
-              <a:rPr>
-                <a:solidFill>
-                  <a:srgbClr val="003B4F"/>
-                </a:solidFill>
-                <a:latin typeface="Courier"/>
-              </a:rPr>
-              <a:t>) </a:t>
+              <a:t>16</a:t>
+            </a:r>
+            <a:r>
+              <a:rPr>
+                <a:solidFill>
+                  <a:srgbClr val="003B4F"/>
+                </a:solidFill>
+                <a:latin typeface="Courier"/>
+              </a:rPr>
+              <a:t> </a:t>
             </a:r>
             <a:r>
               <a:rPr>
@@ -6209,6 +8218,199 @@
                 </a:solidFill>
                 <a:latin typeface="Courier"/>
               </a:rPr>
+              <a:t>~</a:t>
+            </a:r>
+            <a:r>
+              <a:rPr>
+                <a:solidFill>
+                  <a:srgbClr val="003B4F"/>
+                </a:solidFill>
+                <a:latin typeface="Courier"/>
+              </a:rPr>
+              <a:t> </a:t>
+            </a:r>
+            <a:r>
+              <a:rPr>
+                <a:solidFill>
+                  <a:srgbClr val="20794D"/>
+                </a:solidFill>
+                <a:latin typeface="Courier"/>
+              </a:rPr>
+              <a:t>"short"</a:t>
+            </a:r>
+            <a:r>
+              <a:rPr>
+                <a:solidFill>
+                  <a:srgbClr val="003B4F"/>
+                </a:solidFill>
+                <a:latin typeface="Courier"/>
+              </a:rPr>
+              <a:t>,</a:t>
+            </a:r>
+            <a:br/>
+            <a:r>
+              <a:rPr>
+                <a:solidFill>
+                  <a:srgbClr val="003B4F"/>
+                </a:solidFill>
+                <a:latin typeface="Courier"/>
+              </a:rPr>
+              <a:t>      length_mm </a:t>
+            </a:r>
+            <a:r>
+              <a:rPr>
+                <a:solidFill>
+                  <a:srgbClr val="5E5E5E"/>
+                </a:solidFill>
+                <a:latin typeface="Courier"/>
+              </a:rPr>
+              <a:t>&lt;</a:t>
+            </a:r>
+            <a:r>
+              <a:rPr>
+                <a:solidFill>
+                  <a:srgbClr val="003B4F"/>
+                </a:solidFill>
+                <a:latin typeface="Courier"/>
+              </a:rPr>
+              <a:t> </a:t>
+            </a:r>
+            <a:r>
+              <a:rPr>
+                <a:solidFill>
+                  <a:srgbClr val="AD0000"/>
+                </a:solidFill>
+                <a:latin typeface="Courier"/>
+              </a:rPr>
+              <a:t>20</a:t>
+            </a:r>
+            <a:r>
+              <a:rPr>
+                <a:solidFill>
+                  <a:srgbClr val="003B4F"/>
+                </a:solidFill>
+                <a:latin typeface="Courier"/>
+              </a:rPr>
+              <a:t> </a:t>
+            </a:r>
+            <a:r>
+              <a:rPr>
+                <a:solidFill>
+                  <a:srgbClr val="5E5E5E"/>
+                </a:solidFill>
+                <a:latin typeface="Courier"/>
+              </a:rPr>
+              <a:t>~</a:t>
+            </a:r>
+            <a:r>
+              <a:rPr>
+                <a:solidFill>
+                  <a:srgbClr val="003B4F"/>
+                </a:solidFill>
+                <a:latin typeface="Courier"/>
+              </a:rPr>
+              <a:t> </a:t>
+            </a:r>
+            <a:r>
+              <a:rPr>
+                <a:solidFill>
+                  <a:srgbClr val="20794D"/>
+                </a:solidFill>
+                <a:latin typeface="Courier"/>
+              </a:rPr>
+              <a:t>"medium"</a:t>
+            </a:r>
+            <a:r>
+              <a:rPr>
+                <a:solidFill>
+                  <a:srgbClr val="003B4F"/>
+                </a:solidFill>
+                <a:latin typeface="Courier"/>
+              </a:rPr>
+              <a:t>,</a:t>
+            </a:r>
+            <a:br/>
+            <a:r>
+              <a:rPr>
+                <a:solidFill>
+                  <a:srgbClr val="003B4F"/>
+                </a:solidFill>
+                <a:latin typeface="Courier"/>
+              </a:rPr>
+              <a:t>      </a:t>
+            </a:r>
+            <a:r>
+              <a:rPr>
+                <a:solidFill>
+                  <a:srgbClr val="8F5902"/>
+                </a:solidFill>
+                <a:latin typeface="Courier"/>
+              </a:rPr>
+              <a:t>TRUE</a:t>
+            </a:r>
+            <a:r>
+              <a:rPr>
+                <a:solidFill>
+                  <a:srgbClr val="003B4F"/>
+                </a:solidFill>
+                <a:latin typeface="Courier"/>
+              </a:rPr>
+              <a:t>           </a:t>
+            </a:r>
+            <a:r>
+              <a:rPr>
+                <a:solidFill>
+                  <a:srgbClr val="5E5E5E"/>
+                </a:solidFill>
+                <a:latin typeface="Courier"/>
+              </a:rPr>
+              <a:t>~</a:t>
+            </a:r>
+            <a:r>
+              <a:rPr>
+                <a:solidFill>
+                  <a:srgbClr val="003B4F"/>
+                </a:solidFill>
+                <a:latin typeface="Courier"/>
+              </a:rPr>
+              <a:t> </a:t>
+            </a:r>
+            <a:r>
+              <a:rPr>
+                <a:solidFill>
+                  <a:srgbClr val="20794D"/>
+                </a:solidFill>
+                <a:latin typeface="Courier"/>
+              </a:rPr>
+              <a:t>"long"</a:t>
+            </a:r>
+            <a:br/>
+            <a:r>
+              <a:rPr>
+                <a:solidFill>
+                  <a:srgbClr val="003B4F"/>
+                </a:solidFill>
+                <a:latin typeface="Courier"/>
+              </a:rPr>
+              <a:t>    )</a:t>
+            </a:r>
+            <a:br/>
+            <a:r>
+              <a:rPr>
+                <a:solidFill>
+                  <a:srgbClr val="003B4F"/>
+                </a:solidFill>
+                <a:latin typeface="Courier"/>
+              </a:rPr>
+              <a:t>  ) </a:t>
+            </a:r>
+            <a:r>
+              <a:rPr>
+                <a:solidFill>
+                  <a:srgbClr val="5E5E5E"/>
+                </a:solidFill>
+                <a:latin typeface="Courier"/>
+              </a:rPr>
               <a:t>|&gt;</a:t>
             </a:r>
             <a:br/>
@@ -6228,248 +8430,16 @@
                 </a:solidFill>
                 <a:latin typeface="Courier"/>
               </a:rPr>
-              <a:t>select</a:t>
-            </a:r>
-            <a:r>
-              <a:rPr>
-                <a:solidFill>
-                  <a:srgbClr val="003B4F"/>
-                </a:solidFill>
-                <a:latin typeface="Courier"/>
-              </a:rPr>
-              <a:t>(group, n_s, wind, length_mm) </a:t>
-            </a:r>
-            <a:r>
-              <a:rPr>
-                <a:solidFill>
-                  <a:srgbClr val="5E5E5E"/>
-                </a:solidFill>
-                <a:latin typeface="Courier"/>
-              </a:rPr>
-              <a:t>|&gt;</a:t>
-            </a:r>
-            <a:br/>
-            <a:r>
-              <a:rPr>
-                <a:solidFill>
-                  <a:srgbClr val="003B4F"/>
-                </a:solidFill>
-                <a:latin typeface="Courier"/>
-              </a:rPr>
-              <a:t>  </a:t>
-            </a:r>
-            <a:r>
-              <a:rPr>
-                <a:solidFill>
-                  <a:srgbClr val="4758AB"/>
-                </a:solidFill>
-                <a:latin typeface="Courier"/>
-              </a:rPr>
-              <a:t>mutate</a:t>
-            </a:r>
-            <a:r>
-              <a:rPr>
-                <a:solidFill>
-                  <a:srgbClr val="003B4F"/>
-                </a:solidFill>
-                <a:latin typeface="Courier"/>
-              </a:rPr>
-              <a:t>(</a:t>
-            </a:r>
-            <a:br/>
-            <a:r>
-              <a:rPr>
-                <a:solidFill>
-                  <a:srgbClr val="003B4F"/>
-                </a:solidFill>
-                <a:latin typeface="Courier"/>
-              </a:rPr>
-              <a:t>    </a:t>
-            </a:r>
-            <a:r>
-              <a:rPr>
-                <a:solidFill>
-                  <a:srgbClr val="657422"/>
-                </a:solidFill>
-                <a:latin typeface="Courier"/>
-              </a:rPr>
-              <a:t>length_cm  =</a:t>
-            </a:r>
-            <a:r>
-              <a:rPr>
-                <a:solidFill>
-                  <a:srgbClr val="003B4F"/>
-                </a:solidFill>
-                <a:latin typeface="Courier"/>
-              </a:rPr>
-              <a:t> length_mm </a:t>
-            </a:r>
-            <a:r>
-              <a:rPr>
-                <a:solidFill>
-                  <a:srgbClr val="5E5E5E"/>
-                </a:solidFill>
-                <a:latin typeface="Courier"/>
-              </a:rPr>
-              <a:t>/</a:t>
-            </a:r>
-            <a:r>
-              <a:rPr>
-                <a:solidFill>
-                  <a:srgbClr val="003B4F"/>
-                </a:solidFill>
-                <a:latin typeface="Courier"/>
-              </a:rPr>
-              <a:t> </a:t>
-            </a:r>
-            <a:r>
-              <a:rPr>
-                <a:solidFill>
-                  <a:srgbClr val="AD0000"/>
-                </a:solidFill>
-                <a:latin typeface="Courier"/>
-              </a:rPr>
-              <a:t>10</a:t>
-            </a:r>
-            <a:r>
-              <a:rPr>
-                <a:solidFill>
-                  <a:srgbClr val="003B4F"/>
-                </a:solidFill>
-                <a:latin typeface="Courier"/>
-              </a:rPr>
-              <a:t>,</a:t>
-            </a:r>
-            <a:br/>
-            <a:r>
-              <a:rPr>
-                <a:solidFill>
-                  <a:srgbClr val="003B4F"/>
-                </a:solidFill>
-                <a:latin typeface="Courier"/>
-              </a:rPr>
-              <a:t>    </a:t>
-            </a:r>
-            <a:r>
-              <a:rPr>
-                <a:solidFill>
-                  <a:srgbClr val="657422"/>
-                </a:solidFill>
-                <a:latin typeface="Courier"/>
-              </a:rPr>
-              <a:t>log_length =</a:t>
-            </a:r>
-            <a:r>
-              <a:rPr>
-                <a:solidFill>
-                  <a:srgbClr val="003B4F"/>
-                </a:solidFill>
-                <a:latin typeface="Courier"/>
-              </a:rPr>
-              <a:t> </a:t>
-            </a:r>
-            <a:r>
-              <a:rPr>
-                <a:solidFill>
-                  <a:srgbClr val="4758AB"/>
-                </a:solidFill>
-                <a:latin typeface="Courier"/>
-              </a:rPr>
-              <a:t>log</a:t>
-            </a:r>
-            <a:r>
-              <a:rPr>
-                <a:solidFill>
-                  <a:srgbClr val="003B4F"/>
-                </a:solidFill>
-                <a:latin typeface="Courier"/>
-              </a:rPr>
-              <a:t>(length_mm)</a:t>
-            </a:r>
-            <a:br/>
-            <a:r>
-              <a:rPr>
-                <a:solidFill>
-                  <a:srgbClr val="003B4F"/>
-                </a:solidFill>
-                <a:latin typeface="Courier"/>
-              </a:rPr>
-              <a:t>  ) </a:t>
-            </a:r>
-            <a:r>
-              <a:rPr>
-                <a:solidFill>
-                  <a:srgbClr val="5E5E5E"/>
-                </a:solidFill>
-                <a:latin typeface="Courier"/>
-              </a:rPr>
-              <a:t>|&gt;</a:t>
-            </a:r>
-            <a:br/>
-            <a:r>
-              <a:rPr>
-                <a:solidFill>
-                  <a:srgbClr val="003B4F"/>
-                </a:solidFill>
-                <a:latin typeface="Courier"/>
-              </a:rPr>
-              <a:t>  </a:t>
-            </a:r>
-            <a:r>
-              <a:rPr>
-                <a:solidFill>
-                  <a:srgbClr val="4758AB"/>
-                </a:solidFill>
-                <a:latin typeface="Courier"/>
-              </a:rPr>
-              <a:t>arrange</a:t>
-            </a:r>
-            <a:r>
-              <a:rPr>
-                <a:solidFill>
-                  <a:srgbClr val="003B4F"/>
-                </a:solidFill>
-                <a:latin typeface="Courier"/>
-              </a:rPr>
-              <a:t>(n_s, </a:t>
-            </a:r>
-            <a:r>
-              <a:rPr>
-                <a:solidFill>
-                  <a:srgbClr val="4758AB"/>
-                </a:solidFill>
-                <a:latin typeface="Courier"/>
-              </a:rPr>
-              <a:t>desc</a:t>
-            </a:r>
-            <a:r>
-              <a:rPr>
-                <a:solidFill>
-                  <a:srgbClr val="003B4F"/>
-                </a:solidFill>
-                <a:latin typeface="Courier"/>
-              </a:rPr>
-              <a:t>(length_mm))</a:t>
-            </a:r>
-            <a:br/>
-            <a:br/>
-            <a:r>
-              <a:rPr>
-                <a:solidFill>
-                  <a:srgbClr val="4758AB"/>
-                </a:solidFill>
-                <a:latin typeface="Courier"/>
-              </a:rPr>
-              <a:t>head</a:t>
-            </a:r>
-            <a:r>
-              <a:rPr>
-                <a:solidFill>
-                  <a:srgbClr val="003B4F"/>
-                </a:solidFill>
-                <a:latin typeface="Courier"/>
-              </a:rPr>
-              <a:t>(pine_wrangled_df)</a:t>
+              <a:t>count</a:t>
+            </a:r>
+            <a:r>
+              <a:rPr>
+                <a:solidFill>
+                  <a:srgbClr val="003B4F"/>
+                </a:solidFill>
+                <a:latin typeface="Courier"/>
+              </a:rPr>
+              <a:t>(size_class)</a:t>
             </a:r>
           </a:p>
           <a:p>
@@ -6486,7 +8456,7 @@
             </a:r>
             <a:r>
               <a:rPr/>
-              <a:t> In your own words, read this pipeline out loud, step by step, the way we did in lecture.</a:t>
+              <a:t> Change the two cutoffs (16 and 20) to different values of your choosing. How do the counts in each bin shift?</a:t>
             </a:r>
           </a:p>
           <a:p>
@@ -6495,10 +8465,683 @@
             </a:pPr>
             <a:r>
               <a:rPr>
-                <a:latin typeface="Courier"/>
-              </a:rPr>
-              <a:t>Take pine_csv_df, then ______________________, then ______________________,
-then ______________________, then ______________________.</a:t>
+                <a:solidFill>
+                  <a:srgbClr val="5E5E5E"/>
+                </a:solidFill>
+                <a:latin typeface="Courier"/>
+              </a:rPr>
+              <a:t># Write your code here:</a:t>
+            </a:r>
+          </a:p>
+          <a:p>
+            <a:pPr lvl="0" indent="0" marL="0">
+              <a:buNone/>
+            </a:pPr>
+            <a:r>
+              <a:rPr/>
+              <a:t>✏️ </a:t>
+            </a:r>
+            <a:r>
+              <a:rPr b="1"/>
+              <a:t>Your turn:</a:t>
+            </a:r>
+            <a:r>
+              <a:rPr/>
+              <a:t> What happens if you delete the </a:t>
+            </a:r>
+            <a:r>
+              <a:rPr>
+                <a:latin typeface="Courier"/>
+              </a:rPr>
+              <a:t>TRUE ~ "long"</a:t>
+            </a:r>
+            <a:r>
+              <a:rPr/>
+              <a:t> line and rerun? Try it, then explain why that’s dangerous.</a:t>
+            </a:r>
+          </a:p>
+          <a:p>
+            <a:pPr lvl="0" indent="0">
+              <a:buNone/>
+            </a:pPr>
+            <a:r>
+              <a:rPr>
+                <a:latin typeface="Courier"/>
+              </a:rPr>
+              <a:t>________________________________________________________</a:t>
+            </a:r>
+          </a:p>
+          <a:p>
+            <a:pPr lvl="0" indent="0" marL="0">
+              <a:buNone/>
+            </a:pPr>
+            <a:r>
+              <a:rPr b="1"/>
+              <a:t>▶ Run this:</a:t>
+            </a:r>
+          </a:p>
+          <a:p>
+            <a:pPr lvl="0" indent="0">
+              <a:buNone/>
+            </a:pPr>
+            <a:r>
+              <a:rPr>
+                <a:solidFill>
+                  <a:srgbClr val="003B4F"/>
+                </a:solidFill>
+                <a:latin typeface="Courier"/>
+              </a:rPr>
+              <a:t>pine_csv_df </a:t>
+            </a:r>
+            <a:r>
+              <a:rPr>
+                <a:solidFill>
+                  <a:srgbClr val="5E5E5E"/>
+                </a:solidFill>
+                <a:latin typeface="Courier"/>
+              </a:rPr>
+              <a:t>|&gt;</a:t>
+            </a:r>
+            <a:br/>
+            <a:r>
+              <a:rPr>
+                <a:solidFill>
+                  <a:srgbClr val="003B4F"/>
+                </a:solidFill>
+                <a:latin typeface="Courier"/>
+              </a:rPr>
+              <a:t>  </a:t>
+            </a:r>
+            <a:r>
+              <a:rPr>
+                <a:solidFill>
+                  <a:srgbClr val="4758AB"/>
+                </a:solidFill>
+                <a:latin typeface="Courier"/>
+              </a:rPr>
+              <a:t>mutate</a:t>
+            </a:r>
+            <a:r>
+              <a:rPr>
+                <a:solidFill>
+                  <a:srgbClr val="003B4F"/>
+                </a:solidFill>
+                <a:latin typeface="Courier"/>
+              </a:rPr>
+              <a:t>(</a:t>
+            </a:r>
+            <a:br/>
+            <a:r>
+              <a:rPr>
+                <a:solidFill>
+                  <a:srgbClr val="003B4F"/>
+                </a:solidFill>
+                <a:latin typeface="Courier"/>
+              </a:rPr>
+              <a:t>    </a:t>
+            </a:r>
+            <a:r>
+              <a:rPr>
+                <a:solidFill>
+                  <a:srgbClr val="657422"/>
+                </a:solidFill>
+                <a:latin typeface="Courier"/>
+              </a:rPr>
+              <a:t>team_code =</a:t>
+            </a:r>
+            <a:r>
+              <a:rPr>
+                <a:solidFill>
+                  <a:srgbClr val="003B4F"/>
+                </a:solidFill>
+                <a:latin typeface="Courier"/>
+              </a:rPr>
+              <a:t> </a:t>
+            </a:r>
+            <a:r>
+              <a:rPr>
+                <a:solidFill>
+                  <a:srgbClr val="4758AB"/>
+                </a:solidFill>
+                <a:latin typeface="Courier"/>
+              </a:rPr>
+              <a:t>case_when</a:t>
+            </a:r>
+            <a:r>
+              <a:rPr>
+                <a:solidFill>
+                  <a:srgbClr val="003B4F"/>
+                </a:solidFill>
+                <a:latin typeface="Courier"/>
+              </a:rPr>
+              <a:t>(</a:t>
+            </a:r>
+            <a:br/>
+            <a:r>
+              <a:rPr>
+                <a:solidFill>
+                  <a:srgbClr val="003B4F"/>
+                </a:solidFill>
+                <a:latin typeface="Courier"/>
+              </a:rPr>
+              <a:t>      group </a:t>
+            </a:r>
+            <a:r>
+              <a:rPr>
+                <a:solidFill>
+                  <a:srgbClr val="5E5E5E"/>
+                </a:solidFill>
+                <a:latin typeface="Courier"/>
+              </a:rPr>
+              <a:t>==</a:t>
+            </a:r>
+            <a:r>
+              <a:rPr>
+                <a:solidFill>
+                  <a:srgbClr val="003B4F"/>
+                </a:solidFill>
+                <a:latin typeface="Courier"/>
+              </a:rPr>
+              <a:t> </a:t>
+            </a:r>
+            <a:r>
+              <a:rPr>
+                <a:solidFill>
+                  <a:srgbClr val="20794D"/>
+                </a:solidFill>
+                <a:latin typeface="Courier"/>
+              </a:rPr>
+              <a:t>"cephalopods"</a:t>
+            </a:r>
+            <a:r>
+              <a:rPr>
+                <a:solidFill>
+                  <a:srgbClr val="003B4F"/>
+                </a:solidFill>
+                <a:latin typeface="Courier"/>
+              </a:rPr>
+              <a:t> </a:t>
+            </a:r>
+            <a:r>
+              <a:rPr>
+                <a:solidFill>
+                  <a:srgbClr val="5E5E5E"/>
+                </a:solidFill>
+                <a:latin typeface="Courier"/>
+              </a:rPr>
+              <a:t>~</a:t>
+            </a:r>
+            <a:r>
+              <a:rPr>
+                <a:solidFill>
+                  <a:srgbClr val="003B4F"/>
+                </a:solidFill>
+                <a:latin typeface="Courier"/>
+              </a:rPr>
+              <a:t> </a:t>
+            </a:r>
+            <a:r>
+              <a:rPr>
+                <a:solidFill>
+                  <a:srgbClr val="20794D"/>
+                </a:solidFill>
+                <a:latin typeface="Courier"/>
+              </a:rPr>
+              <a:t>"CEPH"</a:t>
+            </a:r>
+            <a:r>
+              <a:rPr>
+                <a:solidFill>
+                  <a:srgbClr val="003B4F"/>
+                </a:solidFill>
+                <a:latin typeface="Courier"/>
+              </a:rPr>
+              <a:t>,</a:t>
+            </a:r>
+            <a:br/>
+            <a:r>
+              <a:rPr>
+                <a:solidFill>
+                  <a:srgbClr val="003B4F"/>
+                </a:solidFill>
+                <a:latin typeface="Courier"/>
+              </a:rPr>
+              <a:t>      group </a:t>
+            </a:r>
+            <a:r>
+              <a:rPr>
+                <a:solidFill>
+                  <a:srgbClr val="5E5E5E"/>
+                </a:solidFill>
+                <a:latin typeface="Courier"/>
+              </a:rPr>
+              <a:t>==</a:t>
+            </a:r>
+            <a:r>
+              <a:rPr>
+                <a:solidFill>
+                  <a:srgbClr val="003B4F"/>
+                </a:solidFill>
+                <a:latin typeface="Courier"/>
+              </a:rPr>
+              <a:t> </a:t>
+            </a:r>
+            <a:r>
+              <a:rPr>
+                <a:solidFill>
+                  <a:srgbClr val="20794D"/>
+                </a:solidFill>
+                <a:latin typeface="Courier"/>
+              </a:rPr>
+              <a:t>"salmon"</a:t>
+            </a:r>
+            <a:r>
+              <a:rPr>
+                <a:solidFill>
+                  <a:srgbClr val="003B4F"/>
+                </a:solidFill>
+                <a:latin typeface="Courier"/>
+              </a:rPr>
+              <a:t>      </a:t>
+            </a:r>
+            <a:r>
+              <a:rPr>
+                <a:solidFill>
+                  <a:srgbClr val="5E5E5E"/>
+                </a:solidFill>
+                <a:latin typeface="Courier"/>
+              </a:rPr>
+              <a:t>~</a:t>
+            </a:r>
+            <a:r>
+              <a:rPr>
+                <a:solidFill>
+                  <a:srgbClr val="003B4F"/>
+                </a:solidFill>
+                <a:latin typeface="Courier"/>
+              </a:rPr>
+              <a:t> </a:t>
+            </a:r>
+            <a:r>
+              <a:rPr>
+                <a:solidFill>
+                  <a:srgbClr val="20794D"/>
+                </a:solidFill>
+                <a:latin typeface="Courier"/>
+              </a:rPr>
+              <a:t>"SALM"</a:t>
+            </a:r>
+            <a:r>
+              <a:rPr>
+                <a:solidFill>
+                  <a:srgbClr val="003B4F"/>
+                </a:solidFill>
+                <a:latin typeface="Courier"/>
+              </a:rPr>
+              <a:t>,</a:t>
+            </a:r>
+            <a:br/>
+            <a:r>
+              <a:rPr>
+                <a:solidFill>
+                  <a:srgbClr val="003B4F"/>
+                </a:solidFill>
+                <a:latin typeface="Courier"/>
+              </a:rPr>
+              <a:t>      group </a:t>
+            </a:r>
+            <a:r>
+              <a:rPr>
+                <a:solidFill>
+                  <a:srgbClr val="5E5E5E"/>
+                </a:solidFill>
+                <a:latin typeface="Courier"/>
+              </a:rPr>
+              <a:t>==</a:t>
+            </a:r>
+            <a:r>
+              <a:rPr>
+                <a:solidFill>
+                  <a:srgbClr val="003B4F"/>
+                </a:solidFill>
+                <a:latin typeface="Courier"/>
+              </a:rPr>
+              <a:t> </a:t>
+            </a:r>
+            <a:r>
+              <a:rPr>
+                <a:solidFill>
+                  <a:srgbClr val="20794D"/>
+                </a:solidFill>
+                <a:latin typeface="Courier"/>
+              </a:rPr>
+              <a:t>"crayfish"</a:t>
+            </a:r>
+            <a:r>
+              <a:rPr>
+                <a:solidFill>
+                  <a:srgbClr val="003B4F"/>
+                </a:solidFill>
+                <a:latin typeface="Courier"/>
+              </a:rPr>
+              <a:t>    </a:t>
+            </a:r>
+            <a:r>
+              <a:rPr>
+                <a:solidFill>
+                  <a:srgbClr val="5E5E5E"/>
+                </a:solidFill>
+                <a:latin typeface="Courier"/>
+              </a:rPr>
+              <a:t>~</a:t>
+            </a:r>
+            <a:r>
+              <a:rPr>
+                <a:solidFill>
+                  <a:srgbClr val="003B4F"/>
+                </a:solidFill>
+                <a:latin typeface="Courier"/>
+              </a:rPr>
+              <a:t> </a:t>
+            </a:r>
+            <a:r>
+              <a:rPr>
+                <a:solidFill>
+                  <a:srgbClr val="20794D"/>
+                </a:solidFill>
+                <a:latin typeface="Courier"/>
+              </a:rPr>
+              <a:t>"CRAY"</a:t>
+            </a:r>
+            <a:r>
+              <a:rPr>
+                <a:solidFill>
+                  <a:srgbClr val="003B4F"/>
+                </a:solidFill>
+                <a:latin typeface="Courier"/>
+              </a:rPr>
+              <a:t>,</a:t>
+            </a:r>
+            <a:br/>
+            <a:r>
+              <a:rPr>
+                <a:solidFill>
+                  <a:srgbClr val="003B4F"/>
+                </a:solidFill>
+                <a:latin typeface="Courier"/>
+              </a:rPr>
+              <a:t>      group </a:t>
+            </a:r>
+            <a:r>
+              <a:rPr>
+                <a:solidFill>
+                  <a:srgbClr val="5E5E5E"/>
+                </a:solidFill>
+                <a:latin typeface="Courier"/>
+              </a:rPr>
+              <a:t>==</a:t>
+            </a:r>
+            <a:r>
+              <a:rPr>
+                <a:solidFill>
+                  <a:srgbClr val="003B4F"/>
+                </a:solidFill>
+                <a:latin typeface="Courier"/>
+              </a:rPr>
+              <a:t> </a:t>
+            </a:r>
+            <a:r>
+              <a:rPr>
+                <a:solidFill>
+                  <a:srgbClr val="20794D"/>
+                </a:solidFill>
+                <a:latin typeface="Courier"/>
+              </a:rPr>
+              <a:t>"snail"</a:t>
+            </a:r>
+            <a:r>
+              <a:rPr>
+                <a:solidFill>
+                  <a:srgbClr val="003B4F"/>
+                </a:solidFill>
+                <a:latin typeface="Courier"/>
+              </a:rPr>
+              <a:t>       </a:t>
+            </a:r>
+            <a:r>
+              <a:rPr>
+                <a:solidFill>
+                  <a:srgbClr val="5E5E5E"/>
+                </a:solidFill>
+                <a:latin typeface="Courier"/>
+              </a:rPr>
+              <a:t>~</a:t>
+            </a:r>
+            <a:r>
+              <a:rPr>
+                <a:solidFill>
+                  <a:srgbClr val="003B4F"/>
+                </a:solidFill>
+                <a:latin typeface="Courier"/>
+              </a:rPr>
+              <a:t> </a:t>
+            </a:r>
+            <a:r>
+              <a:rPr>
+                <a:solidFill>
+                  <a:srgbClr val="20794D"/>
+                </a:solidFill>
+                <a:latin typeface="Courier"/>
+              </a:rPr>
+              <a:t>"SNAI"</a:t>
+            </a:r>
+            <a:r>
+              <a:rPr>
+                <a:solidFill>
+                  <a:srgbClr val="003B4F"/>
+                </a:solidFill>
+                <a:latin typeface="Courier"/>
+              </a:rPr>
+              <a:t>,</a:t>
+            </a:r>
+            <a:br/>
+            <a:r>
+              <a:rPr>
+                <a:solidFill>
+                  <a:srgbClr val="003B4F"/>
+                </a:solidFill>
+                <a:latin typeface="Courier"/>
+              </a:rPr>
+              <a:t>      </a:t>
+            </a:r>
+            <a:r>
+              <a:rPr>
+                <a:solidFill>
+                  <a:srgbClr val="8F5902"/>
+                </a:solidFill>
+                <a:latin typeface="Courier"/>
+              </a:rPr>
+              <a:t>TRUE</a:t>
+            </a:r>
+            <a:r>
+              <a:rPr>
+                <a:solidFill>
+                  <a:srgbClr val="003B4F"/>
+                </a:solidFill>
+                <a:latin typeface="Courier"/>
+              </a:rPr>
+              <a:t>                   </a:t>
+            </a:r>
+            <a:r>
+              <a:rPr>
+                <a:solidFill>
+                  <a:srgbClr val="5E5E5E"/>
+                </a:solidFill>
+                <a:latin typeface="Courier"/>
+              </a:rPr>
+              <a:t>~</a:t>
+            </a:r>
+            <a:r>
+              <a:rPr>
+                <a:solidFill>
+                  <a:srgbClr val="003B4F"/>
+                </a:solidFill>
+                <a:latin typeface="Courier"/>
+              </a:rPr>
+              <a:t> </a:t>
+            </a:r>
+            <a:r>
+              <a:rPr>
+                <a:solidFill>
+                  <a:srgbClr val="20794D"/>
+                </a:solidFill>
+                <a:latin typeface="Courier"/>
+              </a:rPr>
+              <a:t>"UNK"</a:t>
+            </a:r>
+            <a:br/>
+            <a:r>
+              <a:rPr>
+                <a:solidFill>
+                  <a:srgbClr val="003B4F"/>
+                </a:solidFill>
+                <a:latin typeface="Courier"/>
+              </a:rPr>
+              <a:t>    )</a:t>
+            </a:r>
+            <a:br/>
+            <a:r>
+              <a:rPr>
+                <a:solidFill>
+                  <a:srgbClr val="003B4F"/>
+                </a:solidFill>
+                <a:latin typeface="Courier"/>
+              </a:rPr>
+              <a:t>  ) </a:t>
+            </a:r>
+            <a:r>
+              <a:rPr>
+                <a:solidFill>
+                  <a:srgbClr val="5E5E5E"/>
+                </a:solidFill>
+                <a:latin typeface="Courier"/>
+              </a:rPr>
+              <a:t>|&gt;</a:t>
+            </a:r>
+            <a:br/>
+            <a:r>
+              <a:rPr>
+                <a:solidFill>
+                  <a:srgbClr val="003B4F"/>
+                </a:solidFill>
+                <a:latin typeface="Courier"/>
+              </a:rPr>
+              <a:t>  </a:t>
+            </a:r>
+            <a:r>
+              <a:rPr>
+                <a:solidFill>
+                  <a:srgbClr val="4758AB"/>
+                </a:solidFill>
+                <a:latin typeface="Courier"/>
+              </a:rPr>
+              <a:t>distinct</a:t>
+            </a:r>
+            <a:r>
+              <a:rPr>
+                <a:solidFill>
+                  <a:srgbClr val="003B4F"/>
+                </a:solidFill>
+                <a:latin typeface="Courier"/>
+              </a:rPr>
+              <a:t>(group, team_code)</a:t>
+            </a:r>
+          </a:p>
+          <a:p>
+            <a:pPr lvl="0" indent="0" marL="0">
+              <a:buNone/>
+            </a:pPr>
+            <a:r>
+              <a:rPr/>
+              <a:t>✏️ </a:t>
+            </a:r>
+            <a:r>
+              <a:rPr b="1"/>
+              <a:t>Your turn:</a:t>
+            </a:r>
+            <a:r>
+              <a:rPr/>
+              <a:t> Add a </a:t>
+            </a:r>
+            <a:r>
+              <a:rPr>
+                <a:latin typeface="Courier"/>
+              </a:rPr>
+              <a:t>size_class</a:t>
+            </a:r>
+            <a:r>
+              <a:rPr/>
+              <a:t> column (as above) to </a:t>
+            </a:r>
+            <a:r>
+              <a:rPr>
+                <a:latin typeface="Courier"/>
+              </a:rPr>
+              <a:t>pine_wrangled_df</a:t>
+            </a:r>
+            <a:r>
+              <a:rPr/>
+              <a:t>’s recipe — you’ll build the full pipeline with it in Part 6.</a:t>
+            </a:r>
+          </a:p>
+          <a:p>
+            <a:pPr lvl="0" indent="0" marL="1270000">
+              <a:buNone/>
+            </a:pPr>
+            <a:r>
+              <a:rPr sz="2000" b="1"/>
+              <a:t>Tip</a:t>
+            </a:r>
+          </a:p>
+          <a:p>
+            <a:pPr lvl="0" indent="0" marL="1270000">
+              <a:buNone/>
+            </a:pPr>
+            <a:r>
+              <a:rPr sz="2000" b="1"/>
+              <a:t>🚀 If you finish early:</a:t>
+            </a:r>
+            <a:r>
+              <a:rPr sz="2000"/>
+              <a:t> Write a </a:t>
+            </a:r>
+            <a:r>
+              <a:rPr sz="2000">
+                <a:latin typeface="Courier"/>
+              </a:rPr>
+              <a:t>case_when()</a:t>
+            </a:r>
+            <a:r>
+              <a:rPr sz="2000"/>
+              <a:t> that uses </a:t>
+            </a:r>
+            <a:r>
+              <a:rPr sz="2000" b="1"/>
+              <a:t>two</a:t>
+            </a:r>
+            <a:r>
+              <a:rPr sz="2000"/>
+              <a:t> conditions per row (e.g., </a:t>
+            </a:r>
+            <a:r>
+              <a:rPr sz="2000">
+                <a:latin typeface="Courier"/>
+              </a:rPr>
+              <a:t>n_s == "n" &amp; length_mm &gt; 20 ~ "long lee"</a:t>
+            </a:r>
+            <a:r>
+              <a:rPr sz="2000"/>
+              <a:t>) to build a combined category.</a:t>
             </a:r>
           </a:p>
         </p:txBody>
@@ -6550,7 +9193,17 @@
             </a:pPr>
             <a:r>
               <a:rPr/>
-              <a:t>Part 7 · Finding duplicate rows</a:t>
+              <a:t>Part 5 · </a:t>
+            </a:r>
+            <a:r>
+              <a:rPr>
+                <a:latin typeface="Courier"/>
+              </a:rPr>
+              <a:t>arrange()</a:t>
+            </a:r>
+            <a:r>
+              <a:rPr/>
+              <a:t> — sorting rows</a:t>
             </a:r>
           </a:p>
         </p:txBody>
@@ -6589,7 +9242,25 @@
                 </a:solidFill>
                 <a:latin typeface="Courier"/>
               </a:rPr>
-              <a:t>needle_check_df &lt;- </a:t>
+              <a:t>pine_csv_df </a:t>
+            </a:r>
+            <a:r>
+              <a:rPr>
+                <a:solidFill>
+                  <a:srgbClr val="5E5E5E"/>
+                </a:solidFill>
+                <a:latin typeface="Courier"/>
+              </a:rPr>
+              <a:t>|&gt;</a:t>
+            </a:r>
+            <a:r>
+              <a:rPr>
+                <a:solidFill>
+                  <a:srgbClr val="003B4F"/>
+                </a:solidFill>
+                <a:latin typeface="Courier"/>
+              </a:rPr>
+              <a:t> </a:t>
             </a:r>
             <a:r>
               <a:rPr>
@@ -6598,7 +9269,53 @@
                 </a:solidFill>
                 <a:latin typeface="Courier"/>
               </a:rPr>
-              <a:t>read_csv</a:t>
+              <a:t>arrange</a:t>
+            </a:r>
+            <a:r>
+              <a:rPr>
+                <a:solidFill>
+                  <a:srgbClr val="003B4F"/>
+                </a:solidFill>
+                <a:latin typeface="Courier"/>
+              </a:rPr>
+              <a:t>(length_mm)</a:t>
+            </a:r>
+            <a:br/>
+            <a:r>
+              <a:rPr>
+                <a:solidFill>
+                  <a:srgbClr val="003B4F"/>
+                </a:solidFill>
+                <a:latin typeface="Courier"/>
+              </a:rPr>
+              <a:t>pine_csv_df </a:t>
+            </a:r>
+            <a:r>
+              <a:rPr>
+                <a:solidFill>
+                  <a:srgbClr val="5E5E5E"/>
+                </a:solidFill>
+                <a:latin typeface="Courier"/>
+              </a:rPr>
+              <a:t>|&gt;</a:t>
+            </a:r>
+            <a:r>
+              <a:rPr>
+                <a:solidFill>
+                  <a:srgbClr val="003B4F"/>
+                </a:solidFill>
+                <a:latin typeface="Courier"/>
+              </a:rPr>
+              <a:t> </a:t>
+            </a:r>
+            <a:r>
+              <a:rPr>
+                <a:solidFill>
+                  <a:srgbClr val="4758AB"/>
+                </a:solidFill>
+                <a:latin typeface="Courier"/>
+              </a:rPr>
+              <a:t>arrange</a:t>
             </a:r>
             <a:r>
               <a:rPr>
@@ -6612,59 +9329,20 @@
             <a:r>
               <a:rPr>
                 <a:solidFill>
-                  <a:srgbClr val="20794D"/>
-                </a:solidFill>
-                <a:latin typeface="Courier"/>
-              </a:rPr>
-              <a:t>"data/pine_needles_error.csv"</a:t>
-            </a:r>
-            <a:r>
-              <a:rPr>
-                <a:solidFill>
-                  <a:srgbClr val="003B4F"/>
-                </a:solidFill>
-                <a:latin typeface="Courier"/>
-              </a:rPr>
-              <a:t>)</a:t>
-            </a:r>
-            <a:br/>
-            <a:br/>
-            <a:r>
-              <a:rPr>
-                <a:solidFill>
                   <a:srgbClr val="4758AB"/>
                 </a:solidFill>
                 <a:latin typeface="Courier"/>
               </a:rPr>
-              <a:t>nrow</a:t>
-            </a:r>
-            <a:r>
-              <a:rPr>
-                <a:solidFill>
-                  <a:srgbClr val="003B4F"/>
-                </a:solidFill>
-                <a:latin typeface="Courier"/>
-              </a:rPr>
-              <a:t>(needle_check_df)</a:t>
-            </a:r>
-            <a:br/>
-            <a:r>
-              <a:rPr>
-                <a:solidFill>
-                  <a:srgbClr val="4758AB"/>
-                </a:solidFill>
-                <a:latin typeface="Courier"/>
-              </a:rPr>
-              <a:t>n_distinct</a:t>
-            </a:r>
-            <a:r>
-              <a:rPr>
-                <a:solidFill>
-                  <a:srgbClr val="003B4F"/>
-                </a:solidFill>
-                <a:latin typeface="Courier"/>
-              </a:rPr>
-              <a:t>(needle_check_df)</a:t>
+              <a:t>desc</a:t>
+            </a:r>
+            <a:r>
+              <a:rPr>
+                <a:solidFill>
+                  <a:srgbClr val="003B4F"/>
+                </a:solidFill>
+                <a:latin typeface="Courier"/>
+              </a:rPr>
+              <a:t>(length_mm))</a:t>
             </a:r>
           </a:p>
           <a:p>
@@ -6681,245 +9359,41 @@
             </a:r>
             <a:r>
               <a:rPr/>
-              <a:t> Do </a:t>
-            </a:r>
-            <a:r>
-              <a:rPr>
-                <a:latin typeface="Courier"/>
-              </a:rPr>
-              <a:t>nrow()</a:t>
-            </a:r>
-            <a:r>
-              <a:rPr/>
-              <a:t> and </a:t>
-            </a:r>
-            <a:r>
-              <a:rPr>
-                <a:latin typeface="Courier"/>
-              </a:rPr>
-              <a:t>n_distinct()</a:t>
-            </a:r>
-            <a:r>
-              <a:rPr/>
-              <a:t> match? What does that tell you? </a:t>
-            </a:r>
-            <a:r>
-              <a:rPr>
-                <a:latin typeface="Courier"/>
-              </a:rPr>
-              <a:t>________________________</a:t>
-            </a:r>
-          </a:p>
-          <a:p>
-            <a:pPr lvl="0" indent="0" marL="0">
+              <a:t> Sort the data by </a:t>
+            </a:r>
+            <a:r>
+              <a:rPr>
+                <a:latin typeface="Courier"/>
+              </a:rPr>
+              <a:t>n_s</a:t>
+            </a:r>
+            <a:r>
+              <a:rPr/>
+              <a:t>, and within each side, by </a:t>
+            </a:r>
+            <a:r>
+              <a:rPr>
+                <a:latin typeface="Courier"/>
+              </a:rPr>
+              <a:t>length_mm</a:t>
+            </a:r>
+            <a:r>
+              <a:rPr/>
+              <a:t> from longest to shortest.</a:t>
+            </a:r>
+          </a:p>
+          <a:p>
+            <a:pPr lvl="0" indent="0">
               <a:buNone/>
             </a:pPr>
             <a:r>
-              <a:rPr b="1"/>
-              <a:t>▶ Run this:</a:t>
-            </a:r>
-          </a:p>
-          <a:p>
-            <a:pPr lvl="0" indent="0">
-              <a:buNone/>
-            </a:pPr>
-            <a:r>
-              <a:rPr>
-                <a:solidFill>
-                  <a:srgbClr val="003B4F"/>
-                </a:solidFill>
-                <a:latin typeface="Courier"/>
-              </a:rPr>
-              <a:t>needle_check_df </a:t>
-            </a:r>
-            <a:r>
               <a:rPr>
                 <a:solidFill>
                   <a:srgbClr val="5E5E5E"/>
                 </a:solidFill>
                 <a:latin typeface="Courier"/>
               </a:rPr>
-              <a:t>|&gt;</a:t>
-            </a:r>
-            <a:r>
-              <a:rPr>
-                <a:solidFill>
-                  <a:srgbClr val="003B4F"/>
-                </a:solidFill>
-                <a:latin typeface="Courier"/>
-              </a:rPr>
-              <a:t> </a:t>
-            </a:r>
-            <a:r>
-              <a:rPr>
-                <a:solidFill>
-                  <a:srgbClr val="4758AB"/>
-                </a:solidFill>
-                <a:latin typeface="Courier"/>
-              </a:rPr>
-              <a:t>filter</a:t>
-            </a:r>
-            <a:r>
-              <a:rPr>
-                <a:solidFill>
-                  <a:srgbClr val="003B4F"/>
-                </a:solidFill>
-                <a:latin typeface="Courier"/>
-              </a:rPr>
-              <a:t>(</a:t>
-            </a:r>
-            <a:r>
-              <a:rPr>
-                <a:solidFill>
-                  <a:srgbClr val="4758AB"/>
-                </a:solidFill>
-                <a:latin typeface="Courier"/>
-              </a:rPr>
-              <a:t>duplicated</a:t>
-            </a:r>
-            <a:r>
-              <a:rPr>
-                <a:solidFill>
-                  <a:srgbClr val="003B4F"/>
-                </a:solidFill>
-                <a:latin typeface="Courier"/>
-              </a:rPr>
-              <a:t>(needle_check_df))</a:t>
-            </a:r>
-            <a:br/>
-            <a:br/>
-            <a:r>
-              <a:rPr>
-                <a:solidFill>
-                  <a:srgbClr val="003B4F"/>
-                </a:solidFill>
-                <a:latin typeface="Courier"/>
-              </a:rPr>
-              <a:t>needle_clean_df &lt;- needle_check_df </a:t>
-            </a:r>
-            <a:r>
-              <a:rPr>
-                <a:solidFill>
-                  <a:srgbClr val="5E5E5E"/>
-                </a:solidFill>
-                <a:latin typeface="Courier"/>
-              </a:rPr>
-              <a:t>|&gt;</a:t>
-            </a:r>
-            <a:r>
-              <a:rPr>
-                <a:solidFill>
-                  <a:srgbClr val="003B4F"/>
-                </a:solidFill>
-                <a:latin typeface="Courier"/>
-              </a:rPr>
-              <a:t> </a:t>
-            </a:r>
-            <a:r>
-              <a:rPr>
-                <a:solidFill>
-                  <a:srgbClr val="4758AB"/>
-                </a:solidFill>
-                <a:latin typeface="Courier"/>
-              </a:rPr>
-              <a:t>distinct</a:t>
-            </a:r>
-            <a:r>
-              <a:rPr>
-                <a:solidFill>
-                  <a:srgbClr val="003B4F"/>
-                </a:solidFill>
-                <a:latin typeface="Courier"/>
-              </a:rPr>
-              <a:t>()</a:t>
-            </a:r>
-            <a:br/>
-            <a:br/>
-            <a:r>
-              <a:rPr>
-                <a:solidFill>
-                  <a:srgbClr val="4758AB"/>
-                </a:solidFill>
-                <a:latin typeface="Courier"/>
-              </a:rPr>
-              <a:t>nrow</a:t>
-            </a:r>
-            <a:r>
-              <a:rPr>
-                <a:solidFill>
-                  <a:srgbClr val="003B4F"/>
-                </a:solidFill>
-                <a:latin typeface="Courier"/>
-              </a:rPr>
-              <a:t>(needle_clean_df)</a:t>
-            </a:r>
-          </a:p>
-          <a:p>
-            <a:pPr lvl="0" indent="0" marL="0">
-              <a:buNone/>
-            </a:pPr>
-            <a:r>
-              <a:rPr/>
-              <a:t>✏️ </a:t>
-            </a:r>
-            <a:r>
-              <a:rPr b="1"/>
-              <a:t>Your turn:</a:t>
-            </a:r>
-            <a:r>
-              <a:rPr/>
-              <a:t> How many rows did </a:t>
-            </a:r>
-            <a:r>
-              <a:rPr>
-                <a:latin typeface="Courier"/>
-              </a:rPr>
-              <a:t>distinct()</a:t>
-            </a:r>
-            <a:r>
-              <a:rPr/>
-              <a:t> remove? Why does this matter for the sample size you’d report? </a:t>
-            </a:r>
-            <a:r>
-              <a:rPr>
-                <a:latin typeface="Courier"/>
-              </a:rPr>
-              <a:t>________________________</a:t>
-            </a:r>
-          </a:p>
-          <a:p>
-            <a:pPr lvl="0" indent="0" marL="1270000">
-              <a:buNone/>
-            </a:pPr>
-            <a:r>
-              <a:rPr sz="2000"/>
-              <a:t>⚠️ </a:t>
-            </a:r>
-            <a:r>
-              <a:rPr sz="2000" b="1"/>
-              <a:t>Watch out!</a:t>
-            </a:r>
-            <a:r>
-              <a:rPr sz="2000"/>
-              <a:t> </a:t>
-            </a:r>
-            <a:r>
-              <a:rPr sz="2000">
-                <a:latin typeface="Courier"/>
-              </a:rPr>
-              <a:t>distinct()</a:t>
-            </a:r>
-            <a:r>
-              <a:rPr sz="2000"/>
-              <a:t> only catches </a:t>
-            </a:r>
-            <a:r>
-              <a:rPr sz="2000" i="1"/>
-              <a:t>exact</a:t>
-            </a:r>
-            <a:r>
-              <a:rPr sz="2000"/>
-              <a:t> duplicate rows — a mistyped name won’t be caught. Always look at your data too.</a:t>
+              <a:t># Write your code here:</a:t>
             </a:r>
           </a:p>
         </p:txBody>

--- a/docs/content/wrangling_data/wrangling_data_activity.pptx
+++ b/docs/content/wrangling_data/wrangling_data_activity.pptx
@@ -3306,7 +3306,7 @@
             </a:pPr>
             <a:r>
               <a:rPr/>
-              <a:t>Wrangling Your Data</a:t>
+              <a:t>Activity: Wrangling Your Data</a:t>
             </a:r>
           </a:p>
         </p:txBody>
@@ -5374,7 +5374,7 @@
             </a:pPr>
             <a:r>
               <a:rPr/>
-              <a:t>Worksheet 2: Wrangling Your Data</a:t>
+              <a:t>Worksheet: Wrangling Your Data</a:t>
             </a:r>
           </a:p>
         </p:txBody>

--- a/docs/content/wrangling_data/wrangling_data_activity.pptx
+++ b/docs/content/wrangling_data/wrangling_data_activity.pptx
@@ -3543,7 +3543,7 @@
                 </a:solidFill>
                 <a:latin typeface="Courier"/>
               </a:rPr>
-              <a:t>(group, n_s, wind, length_mm) </a:t>
+              <a:t>(group, n_s, sun, length_mm) </a:t>
             </a:r>
             <a:r>
               <a:rPr>
@@ -6113,13 +6113,13 @@
             </a:r>
             <a:r>
               <a:rPr/>
-              <a:t> that keeps only windward (</a:t>
-            </a:r>
-            <a:r>
-              <a:rPr>
-                <a:latin typeface="Courier"/>
-              </a:rPr>
-              <a:t>wind == "wind"</a:t>
+              <a:t> that keeps only sunny (</a:t>
+            </a:r>
+            <a:r>
+              <a:rPr>
+                <a:latin typeface="Courier"/>
+              </a:rPr>
+              <a:t>sun == "sunny"</a:t>
             </a:r>
             <a:r>
               <a:rPr/>
@@ -6295,7 +6295,7 @@
                 </a:solidFill>
                 <a:latin typeface="Courier"/>
               </a:rPr>
-              <a:t># OR: lee side, OR any exceptionally long needle</a:t>
+              <a:t># OR: shady side, OR any exceptionally long needle</a:t>
             </a:r>
             <a:br/>
             <a:r>
@@ -7073,13 +7073,13 @@
             </a:r>
             <a:r>
               <a:rPr/>
-              <a:t> that keeps windward (</a:t>
-            </a:r>
-            <a:r>
-              <a:rPr>
-                <a:latin typeface="Courier"/>
-              </a:rPr>
-              <a:t>wind == "wind"</a:t>
+              <a:t> that keeps sunny (</a:t>
+            </a:r>
+            <a:r>
+              <a:rPr>
+                <a:latin typeface="Courier"/>
+              </a:rPr>
+              <a:t>sun == "sunny"</a:t>
             </a:r>
             <a:r>
               <a:rPr/>
@@ -9137,7 +9137,7 @@
               <a:rPr sz="2000">
                 <a:latin typeface="Courier"/>
               </a:rPr>
-              <a:t>n_s == "n" &amp; length_mm &gt; 20 ~ "long lee"</a:t>
+              <a:t>n_s == "n" &amp; length_mm &gt; 20 ~ "long shady"</a:t>
             </a:r>
             <a:r>
               <a:rPr sz="2000"/>

--- a/docs/content/wrangling_data/wrangling_data_activity.pptx
+++ b/docs/content/wrangling_data/wrangling_data_activity.pptx
@@ -4282,13 +4282,20 @@
             </a:r>
             <a:r>
               <a:rPr/>
-              <a:t> match? What does that tell you? </a:t>
-            </a:r>
-            <a:r>
-              <a:rPr>
-                <a:latin typeface="Courier"/>
-              </a:rPr>
-              <a:t>________________________</a:t>
+              <a:t> match?</a:t>
+            </a:r>
+            <a:br/>
+            <a:r>
+              <a:rPr/>
+              <a:t>What does that tell you?</a:t>
+            </a:r>
+            <a:br/>
+            <a:br/>
+            <a:r>
+              <a:rPr>
+                <a:latin typeface="Courier"/>
+              </a:rPr>
+              <a:t>_______________________________________________________________________</a:t>
             </a:r>
           </a:p>
           <a:p>
@@ -4459,13 +4466,15 @@
             </a:r>
             <a:r>
               <a:rPr/>
-              <a:t> remove? Why does this matter for the sample size you’d report? </a:t>
-            </a:r>
-            <a:r>
-              <a:rPr>
-                <a:latin typeface="Courier"/>
-              </a:rPr>
-              <a:t>________________________</a:t>
+              <a:t> remove? Why does this matter for the sample size you’d report?</a:t>
+            </a:r>
+            <a:br/>
+            <a:br/>
+            <a:r>
+              <a:rPr>
+                <a:latin typeface="Courier"/>
+              </a:rPr>
+              <a:t>_________________________________________________________________________</a:t>
             </a:r>
           </a:p>
           <a:p>
@@ -4500,7 +4509,7 @@
             </a:r>
             <a:r>
               <a:rPr sz="2000"/>
-              <a:t> duplicate rows — a mistyped name won’t be caught. Always look at your data too.</a:t>
+              <a:t> duplicate rows — a mistiped name won’t be caught. Always look at your data too.</a:t>
             </a:r>
           </a:p>
         </p:txBody>
@@ -4706,6 +4715,8 @@
               </a:rPr>
               <a:t># Write your code here:</a:t>
             </a:r>
+            <a:br/>
+            <a:br/>
           </a:p>
           <a:p>
             <a:pPr lvl="0" indent="0" marL="1270000">
@@ -5045,7 +5056,13 @@
             </a:r>
             <a:r>
               <a:rPr/>
-              <a:t> Run your whole script top to bottom. Ran cleanly? </a:t>
+              <a:t> Run your whole script top to bottom.</a:t>
+            </a:r>
+            <a:br/>
+            <a:br/>
+            <a:r>
+              <a:rPr/>
+              <a:t>Ran cleanly? </a:t>
             </a:r>
             <a:r>
               <a:rPr>
@@ -5055,13 +5072,15 @@
             </a:r>
             <a:r>
               <a:rPr/>
-              <a:t> — if not, the error was: </a:t>
-            </a:r>
-            <a:r>
-              <a:rPr>
-                <a:latin typeface="Courier"/>
-              </a:rPr>
-              <a:t>________________________</a:t>
+              <a:t> — if not, the error was:</a:t>
+            </a:r>
+            <a:br/>
+            <a:br/>
+            <a:r>
+              <a:rPr>
+                <a:latin typeface="Courier"/>
+              </a:rPr>
+              <a:t>____________________________________________________________</a:t>
             </a:r>
           </a:p>
           <a:p>
@@ -5249,7 +5268,21 @@
             </a:r>
             <a:r>
               <a:rPr/>
-              <a:t>? Spelling? A missing </a:t>
+              <a:t>?</a:t>
+            </a:r>
+          </a:p>
+          <a:p>
+            <a:pPr lvl="1"/>
+            <a:r>
+              <a:rPr/>
+              <a:t>Spelling?</a:t>
+            </a:r>
+          </a:p>
+          <a:p>
+            <a:pPr lvl="1"/>
+            <a:r>
+              <a:rPr/>
+              <a:t>A missing </a:t>
             </a:r>
             <a:r>
               <a:rPr>
@@ -5759,7 +5792,8 @@
 Column:              Type:
 Column:              Type:
 Column:              Type:
-Column:              Type:</a:t>
+Column:              Type:
+</a:t>
             </a:r>
           </a:p>
         </p:txBody>
@@ -6139,6 +6173,7 @@
               </a:rPr>
               <a:t># Write your code here:</a:t>
             </a:r>
+            <a:br/>
           </a:p>
           <a:p>
             <a:pPr lvl="0" indent="0" marL="1270000">
@@ -6613,6 +6648,7 @@
               </a:rPr>
               <a:t># Write your code here:</a:t>
             </a:r>
+            <a:br/>
           </a:p>
           <a:p>
             <a:pPr lvl="0" indent="0" marL="0">
@@ -7137,6 +7173,8 @@
               </a:rPr>
               <a:t># Write your code here:</a:t>
             </a:r>
+            <a:br/>
+            <a:br/>
           </a:p>
         </p:txBody>
       </p:sp>
@@ -7469,6 +7507,8 @@
               </a:rPr>
               <a:t># Write your code here:</a:t>
             </a:r>
+            <a:br/>
+            <a:br/>
           </a:p>
         </p:txBody>
       </p:sp>
@@ -7900,6 +7940,8 @@
               </a:rPr>
               <a:t># Write your code here:</a:t>
             </a:r>
+            <a:br/>
+            <a:br/>
           </a:p>
           <a:p>
             <a:pPr lvl="0" indent="0" marL="0">
@@ -7941,8 +7983,9 @@
             </a:r>
             <a:r>
               <a:rPr/>
-              <a:t> did each example above add? </a:t>
-            </a:r>
+              <a:t> did each example above add?</a:t>
+            </a:r>
+            <a:br/>
             <a:r>
               <a:rPr>
                 <a:latin typeface="Courier"/>
@@ -8472,6 +8515,8 @@
               </a:rPr>
               <a:t># Write your code here:</a:t>
             </a:r>
+            <a:br/>
+            <a:br/>
           </a:p>
           <a:p>
             <a:pPr lvl="0" indent="0" marL="0">
@@ -8508,7 +8553,9 @@
               <a:rPr>
                 <a:latin typeface="Courier"/>
               </a:rPr>
-              <a:t>________________________________________________________</a:t>
+              <a:t>
+____________________________________________________________________________________
+</a:t>
             </a:r>
           </a:p>
           <a:p>
@@ -9395,6 +9442,8 @@
               </a:rPr>
               <a:t># Write your code here:</a:t>
             </a:r>
+            <a:br/>
+            <a:br/>
           </a:p>
         </p:txBody>
       </p:sp>
